--- a/Presentation_Predictive_Analytics.pptx
+++ b/Presentation_Predictive_Analytics.pptx
@@ -5,20 +5,20 @@
     <p:sldMasterId id="2147483648" r:id="rId1"/>
   </p:sldMasterIdLst>
   <p:sldIdLst>
-    <p:sldId id="256" r:id="rId2"/>
-    <p:sldId id="257" r:id="rId3"/>
-    <p:sldId id="258" r:id="rId4"/>
-    <p:sldId id="259" r:id="rId5"/>
-    <p:sldId id="260" r:id="rId6"/>
-    <p:sldId id="261" r:id="rId7"/>
-    <p:sldId id="262" r:id="rId8"/>
-    <p:sldId id="263" r:id="rId9"/>
-    <p:sldId id="264" r:id="rId10"/>
-    <p:sldId id="265" r:id="rId11"/>
-    <p:sldId id="266" r:id="rId12"/>
-    <p:sldId id="267" r:id="rId13"/>
+    <p:sldId id="256" r:id="rId7"/>
+    <p:sldId id="257" r:id="rId8"/>
+    <p:sldId id="258" r:id="rId9"/>
+    <p:sldId id="259" r:id="rId10"/>
+    <p:sldId id="260" r:id="rId11"/>
+    <p:sldId id="261" r:id="rId12"/>
+    <p:sldId id="262" r:id="rId13"/>
+    <p:sldId id="263" r:id="rId14"/>
+    <p:sldId id="264" r:id="rId15"/>
+    <p:sldId id="265" r:id="rId16"/>
+    <p:sldId id="266" r:id="rId17"/>
+    <p:sldId id="267" r:id="rId18"/>
   </p:sldIdLst>
-  <p:sldSz cx="12192000" cy="6858000"/>
+  <p:sldSz cx="12191695" cy="6858000" type="screen4x3"/>
   <p:notesSz cx="6858000" cy="9144000"/>
   <p:defaultTextStyle>
     <a:defPPr>
@@ -115,22 +115,6 @@
       </a:defRPr>
     </a:lvl9pPr>
   </p:defaultTextStyle>
-  <p:extLst>
-    <p:ext uri="{EFAFB233-063F-42B5-8137-9DF3F51BA10A}">
-      <p15:sldGuideLst xmlns:p15="http://schemas.microsoft.com/office/powerpoint/2012/main">
-        <p15:guide id="1" orient="horz" pos="2160">
-          <p15:clr>
-            <a:srgbClr val="A4A3A4"/>
-          </p15:clr>
-        </p15:guide>
-        <p15:guide id="2" pos="2880">
-          <p15:clr>
-            <a:srgbClr val="A4A3A4"/>
-          </p15:clr>
-        </p15:guide>
-      </p15:sldGuideLst>
-    </p:ext>
-  </p:extLst>
 </p:presentation>
 </file>
 
@@ -315,7 +299,7 @@
           <a:p>
             <a:fld id="{5BCAD085-E8A6-8845-BD4E-CB4CCA059FC4}" type="datetimeFigureOut">
               <a:rPr lang="en-US" smtClean="0"/>
-              <a:t>10/18/2026</a:t>
+              <a:t>1/27/13</a:t>
             </a:fld>
             <a:endParaRPr lang="en-US"/>
           </a:p>
@@ -485,7 +469,7 @@
           <a:p>
             <a:fld id="{5BCAD085-E8A6-8845-BD4E-CB4CCA059FC4}" type="datetimeFigureOut">
               <a:rPr lang="en-US" smtClean="0"/>
-              <a:t>10/18/2026</a:t>
+              <a:t>1/27/13</a:t>
             </a:fld>
             <a:endParaRPr lang="en-US"/>
           </a:p>
@@ -665,7 +649,7 @@
           <a:p>
             <a:fld id="{5BCAD085-E8A6-8845-BD4E-CB4CCA059FC4}" type="datetimeFigureOut">
               <a:rPr lang="en-US" smtClean="0"/>
-              <a:t>10/18/2026</a:t>
+              <a:t>1/27/13</a:t>
             </a:fld>
             <a:endParaRPr lang="en-US"/>
           </a:p>
@@ -835,7 +819,7 @@
           <a:p>
             <a:fld id="{5BCAD085-E8A6-8845-BD4E-CB4CCA059FC4}" type="datetimeFigureOut">
               <a:rPr lang="en-US" smtClean="0"/>
-              <a:t>10/18/2026</a:t>
+              <a:t>1/27/13</a:t>
             </a:fld>
             <a:endParaRPr lang="en-US"/>
           </a:p>
@@ -1081,7 +1065,7 @@
           <a:p>
             <a:fld id="{5BCAD085-E8A6-8845-BD4E-CB4CCA059FC4}" type="datetimeFigureOut">
               <a:rPr lang="en-US" smtClean="0"/>
-              <a:t>10/18/2026</a:t>
+              <a:t>1/27/13</a:t>
             </a:fld>
             <a:endParaRPr lang="en-US"/>
           </a:p>
@@ -1369,7 +1353,7 @@
           <a:p>
             <a:fld id="{5BCAD085-E8A6-8845-BD4E-CB4CCA059FC4}" type="datetimeFigureOut">
               <a:rPr lang="en-US" smtClean="0"/>
-              <a:t>10/18/2026</a:t>
+              <a:t>1/27/13</a:t>
             </a:fld>
             <a:endParaRPr lang="en-US"/>
           </a:p>
@@ -1791,7 +1775,7 @@
           <a:p>
             <a:fld id="{5BCAD085-E8A6-8845-BD4E-CB4CCA059FC4}" type="datetimeFigureOut">
               <a:rPr lang="en-US" smtClean="0"/>
-              <a:t>10/18/2026</a:t>
+              <a:t>1/27/13</a:t>
             </a:fld>
             <a:endParaRPr lang="en-US"/>
           </a:p>
@@ -1909,7 +1893,7 @@
           <a:p>
             <a:fld id="{5BCAD085-E8A6-8845-BD4E-CB4CCA059FC4}" type="datetimeFigureOut">
               <a:rPr lang="en-US" smtClean="0"/>
-              <a:t>10/18/2026</a:t>
+              <a:t>1/27/13</a:t>
             </a:fld>
             <a:endParaRPr lang="en-US"/>
           </a:p>
@@ -2004,7 +1988,7 @@
           <a:p>
             <a:fld id="{5BCAD085-E8A6-8845-BD4E-CB4CCA059FC4}" type="datetimeFigureOut">
               <a:rPr lang="en-US" smtClean="0"/>
-              <a:t>10/18/2026</a:t>
+              <a:t>1/27/13</a:t>
             </a:fld>
             <a:endParaRPr lang="en-US"/>
           </a:p>
@@ -2281,7 +2265,7 @@
           <a:p>
             <a:fld id="{5BCAD085-E8A6-8845-BD4E-CB4CCA059FC4}" type="datetimeFigureOut">
               <a:rPr lang="en-US" smtClean="0"/>
-              <a:t>10/18/2026</a:t>
+              <a:t>1/27/13</a:t>
             </a:fld>
             <a:endParaRPr lang="en-US"/>
           </a:p>
@@ -2534,7 +2518,7 @@
           <a:p>
             <a:fld id="{5BCAD085-E8A6-8845-BD4E-CB4CCA059FC4}" type="datetimeFigureOut">
               <a:rPr lang="en-US" smtClean="0"/>
-              <a:t>10/18/2026</a:t>
+              <a:t>1/27/13</a:t>
             </a:fld>
             <a:endParaRPr lang="en-US"/>
           </a:p>
@@ -2747,7 +2731,7 @@
           <a:p>
             <a:fld id="{5BCAD085-E8A6-8845-BD4E-CB4CCA059FC4}" type="datetimeFigureOut">
               <a:rPr lang="en-US" smtClean="0"/>
-              <a:t>10/18/2026</a:t>
+              <a:t>1/27/13</a:t>
             </a:fld>
             <a:endParaRPr lang="en-US"/>
           </a:p>
@@ -3106,7 +3090,7 @@
 </file>
 
 <file path=ppt/slides/slide1.xml><?xml version="1.0" encoding="utf-8"?>
-<p:sld xmlns:a="http://schemas.openxmlformats.org/drawingml/2006/main" xmlns:r="http://schemas.openxmlformats.org/officeDocument/2006/relationships" xmlns:p="http://schemas.openxmlformats.org/presentationml/2006/main">
+<p:sld xmlns:a="http://schemas.openxmlformats.org/drawingml/2006/main" xmlns:p="http://schemas.openxmlformats.org/presentationml/2006/main" xmlns:r="http://schemas.openxmlformats.org/officeDocument/2006/relationships">
   <p:cSld>
     <p:bg>
       <p:bgPr>
@@ -3122,17 +3106,10 @@
         <p:cNvGrpSpPr/>
         <p:nvPr/>
       </p:nvGrpSpPr>
-      <p:grpSpPr>
-        <a:xfrm>
-          <a:off x="0" y="0"/>
-          <a:ext cx="0" cy="0"/>
-          <a:chOff x="0" y="0"/>
-          <a:chExt cx="0" cy="0"/>
-        </a:xfrm>
-      </p:grpSpPr>
+      <p:grpSpPr/>
       <p:pic>
         <p:nvPicPr>
-          <p:cNvPr id="2" name="Picture 1" descr="images.png"/>
+          <p:cNvPr id="2" name="Picture 1" descr="logo.png"/>
           <p:cNvPicPr>
             <a:picLocks noChangeAspect="1"/>
           </p:cNvPicPr>
@@ -3194,7 +3171,6 @@
           <a:lstStyle/>
           <a:p>
             <a:pPr algn="ctr"/>
-            <a:endParaRPr/>
           </a:p>
         </p:txBody>
       </p:sp>
@@ -3238,7 +3214,6 @@
           <a:lstStyle/>
           <a:p>
             <a:pPr algn="ctr"/>
-            <a:endParaRPr/>
           </a:p>
         </p:txBody>
       </p:sp>
@@ -3388,13 +3363,48 @@
       </p:sp>
       <p:sp>
         <p:nvSpPr>
+          <p:cNvPr id="9" name="TextBox 8"/>
+          <p:cNvSpPr txBox="1"/>
+          <p:nvPr/>
+        </p:nvSpPr>
+        <p:spPr>
+          <a:xfrm>
+            <a:off x="731520" y="5349240"/>
+            <a:ext cx="10058400" cy="320040"/>
+          </a:xfrm>
+          <a:prstGeom prst="rect">
+            <a:avLst/>
+          </a:prstGeom>
+          <a:noFill/>
+        </p:spPr>
+        <p:txBody>
+          <a:bodyPr wrap="square">
+            <a:spAutoFit/>
+          </a:bodyPr>
+          <a:lstStyle/>
+          <a:p>
+            <a:pPr algn="l">
+              <a:defRPr sz="1100" b="1">
+                <a:solidFill>
+                  <a:srgbClr val="C5A55A"/>
+                </a:solidFill>
+              </a:defRPr>
+            </a:pPr>
+            <a:r>
+              <a:t>Lead Data &amp; Econometrics (40%)  •  Lead ML &amp; Tuning (40%)  •  Lead Business &amp; Strategy (20%)</a:t>
+            </a:r>
+          </a:p>
+        </p:txBody>
+      </p:sp>
+      <p:sp>
+        <p:nvSpPr>
           <p:cNvPr id="10" name="TextBox 9"/>
           <p:cNvSpPr txBox="1"/>
           <p:nvPr/>
         </p:nvSpPr>
         <p:spPr>
           <a:xfrm>
-            <a:off x="731520" y="5349240"/>
+            <a:off x="731520" y="5715000"/>
             <a:ext cx="10058400" cy="274320"/>
           </a:xfrm>
           <a:prstGeom prst="rect">
@@ -3416,16 +3426,7 @@
               </a:defRPr>
             </a:pPr>
             <a:r>
-              <a:rPr dirty="0"/>
-              <a:t>Predictive Analytics  •  </a:t>
-            </a:r>
-            <a:r>
-              <a:rPr dirty="0" err="1"/>
-              <a:t>Cakrawala</a:t>
-            </a:r>
-            <a:r>
-              <a:rPr dirty="0"/>
-              <a:t> University  •  October 2026</a:t>
+              <a:t>Predictive Analytics  •  Cakrawala University  •  October 2026</a:t>
             </a:r>
           </a:p>
         </p:txBody>
@@ -3439,7 +3440,7 @@
 </file>
 
 <file path=ppt/slides/slide10.xml><?xml version="1.0" encoding="utf-8"?>
-<p:sld xmlns:a="http://schemas.openxmlformats.org/drawingml/2006/main" xmlns:r="http://schemas.openxmlformats.org/officeDocument/2006/relationships" xmlns:p="http://schemas.openxmlformats.org/presentationml/2006/main">
+<p:sld xmlns:a="http://schemas.openxmlformats.org/drawingml/2006/main" xmlns:p="http://schemas.openxmlformats.org/presentationml/2006/main" xmlns:r="http://schemas.openxmlformats.org/officeDocument/2006/relationships">
   <p:cSld>
     <p:bg>
       <p:bgPr>
@@ -3455,17 +3456,10 @@
         <p:cNvGrpSpPr/>
         <p:nvPr/>
       </p:nvGrpSpPr>
-      <p:grpSpPr>
-        <a:xfrm>
-          <a:off x="0" y="0"/>
-          <a:ext cx="0" cy="0"/>
-          <a:chOff x="0" y="0"/>
-          <a:chExt cx="0" cy="0"/>
-        </a:xfrm>
-      </p:grpSpPr>
+      <p:grpSpPr/>
       <p:pic>
         <p:nvPicPr>
-          <p:cNvPr id="2" name="Picture 1" descr="images.png"/>
+          <p:cNvPr id="2" name="Picture 1" descr="logo.png"/>
           <p:cNvPicPr>
             <a:picLocks noChangeAspect="1"/>
           </p:cNvPicPr>
@@ -3527,7 +3521,6 @@
           <a:lstStyle/>
           <a:p>
             <a:pPr algn="ctr"/>
-            <a:endParaRPr/>
           </a:p>
         </p:txBody>
       </p:sp>
@@ -3606,7 +3599,6 @@
           <a:lstStyle/>
           <a:p>
             <a:pPr algn="ctr"/>
-            <a:endParaRPr/>
           </a:p>
         </p:txBody>
       </p:sp>
@@ -3629,27 +3621,9 @@
                 <a:tableStyleId>{5C22544A-7EE6-4342-B048-85BDC9FD1C3A}</a:tableStyleId>
               </a:tblPr>
               <a:tblGrid>
-                <a:gridCol w="2133600">
-                  <a:extLst>
-                    <a:ext uri="{9D8B030D-6E8A-4147-A177-3AD203B41FA5}">
-                      <a16:colId xmlns:a16="http://schemas.microsoft.com/office/drawing/2014/main" val="20000"/>
-                    </a:ext>
-                  </a:extLst>
-                </a:gridCol>
-                <a:gridCol w="2133600">
-                  <a:extLst>
-                    <a:ext uri="{9D8B030D-6E8A-4147-A177-3AD203B41FA5}">
-                      <a16:colId xmlns:a16="http://schemas.microsoft.com/office/drawing/2014/main" val="20001"/>
-                    </a:ext>
-                  </a:extLst>
-                </a:gridCol>
-                <a:gridCol w="2133600">
-                  <a:extLst>
-                    <a:ext uri="{9D8B030D-6E8A-4147-A177-3AD203B41FA5}">
-                      <a16:colId xmlns:a16="http://schemas.microsoft.com/office/drawing/2014/main" val="20002"/>
-                    </a:ext>
-                  </a:extLst>
-                </a:gridCol>
+                <a:gridCol w="2133600"/>
+                <a:gridCol w="2133600"/>
+                <a:gridCol w="2133600"/>
               </a:tblGrid>
               <a:tr h="365760">
                 <a:tc>
@@ -3658,7 +3632,7 @@
                     <a:lstStyle/>
                     <a:p>
                       <a:pPr algn="ctr">
-                        <a:defRPr sz="1100" b="1">
+                        <a:defRPr b="1" sz="1100">
                           <a:solidFill>
                             <a:srgbClr val="FFFFFF"/>
                           </a:solidFill>
@@ -3681,7 +3655,7 @@
                     <a:lstStyle/>
                     <a:p>
                       <a:pPr algn="ctr">
-                        <a:defRPr sz="1100" b="1">
+                        <a:defRPr b="1" sz="1100">
                           <a:solidFill>
                             <a:srgbClr val="FFFFFF"/>
                           </a:solidFill>
@@ -3693,7 +3667,7 @@
                     </a:p>
                     <a:p>
                       <a:pPr algn="ctr">
-                        <a:defRPr sz="1100" b="1">
+                        <a:defRPr b="1" sz="1100">
                           <a:solidFill>
                             <a:srgbClr val="FFFFFF"/>
                           </a:solidFill>
@@ -3716,7 +3690,7 @@
                     <a:lstStyle/>
                     <a:p>
                       <a:pPr algn="ctr">
-                        <a:defRPr sz="1100" b="1">
+                        <a:defRPr b="1" sz="1100">
                           <a:solidFill>
                             <a:srgbClr val="FFFFFF"/>
                           </a:solidFill>
@@ -3728,7 +3702,7 @@
                     </a:p>
                     <a:p>
                       <a:pPr algn="ctr">
-                        <a:defRPr sz="1100" b="1">
+                        <a:defRPr b="1" sz="1100">
                           <a:solidFill>
                             <a:srgbClr val="FFFFFF"/>
                           </a:solidFill>
@@ -3745,11 +3719,6 @@
                     </a:solidFill>
                   </a:tcPr>
                 </a:tc>
-                <a:extLst>
-                  <a:ext uri="{0D108BD9-81ED-4DB2-BD59-A6C34878D82A}">
-                    <a16:rowId xmlns:a16="http://schemas.microsoft.com/office/drawing/2014/main" val="10000"/>
-                  </a:ext>
-                </a:extLst>
               </a:tr>
               <a:tr h="365760">
                 <a:tc>
@@ -3817,11 +3786,6 @@
                     </a:solidFill>
                   </a:tcPr>
                 </a:tc>
-                <a:extLst>
-                  <a:ext uri="{0D108BD9-81ED-4DB2-BD59-A6C34878D82A}">
-                    <a16:rowId xmlns:a16="http://schemas.microsoft.com/office/drawing/2014/main" val="10001"/>
-                  </a:ext>
-                </a:extLst>
               </a:tr>
               <a:tr h="365760">
                 <a:tc>
@@ -3889,11 +3853,6 @@
                     </a:solidFill>
                   </a:tcPr>
                 </a:tc>
-                <a:extLst>
-                  <a:ext uri="{0D108BD9-81ED-4DB2-BD59-A6C34878D82A}">
-                    <a16:rowId xmlns:a16="http://schemas.microsoft.com/office/drawing/2014/main" val="10002"/>
-                  </a:ext>
-                </a:extLst>
               </a:tr>
               <a:tr h="365760">
                 <a:tc>
@@ -3961,11 +3920,6 @@
                     </a:solidFill>
                   </a:tcPr>
                 </a:tc>
-                <a:extLst>
-                  <a:ext uri="{0D108BD9-81ED-4DB2-BD59-A6C34878D82A}">
-                    <a16:rowId xmlns:a16="http://schemas.microsoft.com/office/drawing/2014/main" val="10003"/>
-                  </a:ext>
-                </a:extLst>
               </a:tr>
               <a:tr h="365760">
                 <a:tc>
@@ -4033,11 +3987,6 @@
                     </a:solidFill>
                   </a:tcPr>
                 </a:tc>
-                <a:extLst>
-                  <a:ext uri="{0D108BD9-81ED-4DB2-BD59-A6C34878D82A}">
-                    <a16:rowId xmlns:a16="http://schemas.microsoft.com/office/drawing/2014/main" val="10004"/>
-                  </a:ext>
-                </a:extLst>
               </a:tr>
               <a:tr h="365760">
                 <a:tc>
@@ -4097,11 +4046,6 @@
                   </a:txBody>
                   <a:tcPr/>
                 </a:tc>
-                <a:extLst>
-                  <a:ext uri="{0D108BD9-81ED-4DB2-BD59-A6C34878D82A}">
-                    <a16:rowId xmlns:a16="http://schemas.microsoft.com/office/drawing/2014/main" val="10005"/>
-                  </a:ext>
-                </a:extLst>
               </a:tr>
               <a:tr h="365760">
                 <a:tc>
@@ -4161,11 +4105,6 @@
                   </a:txBody>
                   <a:tcPr/>
                 </a:tc>
-                <a:extLst>
-                  <a:ext uri="{0D108BD9-81ED-4DB2-BD59-A6C34878D82A}">
-                    <a16:rowId xmlns:a16="http://schemas.microsoft.com/office/drawing/2014/main" val="10006"/>
-                  </a:ext>
-                </a:extLst>
               </a:tr>
               <a:tr h="365760">
                 <a:tc>
@@ -4225,11 +4164,6 @@
                   </a:txBody>
                   <a:tcPr/>
                 </a:tc>
-                <a:extLst>
-                  <a:ext uri="{0D108BD9-81ED-4DB2-BD59-A6C34878D82A}">
-                    <a16:rowId xmlns:a16="http://schemas.microsoft.com/office/drawing/2014/main" val="10007"/>
-                  </a:ext>
-                </a:extLst>
               </a:tr>
               <a:tr h="365760">
                 <a:tc>
@@ -4289,11 +4223,6 @@
                   </a:txBody>
                   <a:tcPr/>
                 </a:tc>
-                <a:extLst>
-                  <a:ext uri="{0D108BD9-81ED-4DB2-BD59-A6C34878D82A}">
-                    <a16:rowId xmlns:a16="http://schemas.microsoft.com/office/drawing/2014/main" val="10008"/>
-                  </a:ext>
-                </a:extLst>
               </a:tr>
               <a:tr h="365760">
                 <a:tc>
@@ -4361,11 +4290,6 @@
                     </a:solidFill>
                   </a:tcPr>
                 </a:tc>
-                <a:extLst>
-                  <a:ext uri="{0D108BD9-81ED-4DB2-BD59-A6C34878D82A}">
-                    <a16:rowId xmlns:a16="http://schemas.microsoft.com/office/drawing/2014/main" val="10009"/>
-                  </a:ext>
-                </a:extLst>
               </a:tr>
             </a:tbl>
           </a:graphicData>
@@ -4448,7 +4372,6 @@
                 </a:solidFill>
               </a:defRPr>
             </a:pPr>
-            <a:endParaRPr/>
           </a:p>
           <a:p>
             <a:pPr>
@@ -4506,7 +4429,6 @@
                 </a:solidFill>
               </a:defRPr>
             </a:pPr>
-            <a:endParaRPr/>
           </a:p>
           <a:p>
             <a:pPr>
@@ -4639,7 +4561,7 @@
 </file>
 
 <file path=ppt/slides/slide11.xml><?xml version="1.0" encoding="utf-8"?>
-<p:sld xmlns:a="http://schemas.openxmlformats.org/drawingml/2006/main" xmlns:r="http://schemas.openxmlformats.org/officeDocument/2006/relationships" xmlns:p="http://schemas.openxmlformats.org/presentationml/2006/main">
+<p:sld xmlns:a="http://schemas.openxmlformats.org/drawingml/2006/main" xmlns:p="http://schemas.openxmlformats.org/presentationml/2006/main" xmlns:r="http://schemas.openxmlformats.org/officeDocument/2006/relationships">
   <p:cSld>
     <p:bg>
       <p:bgPr>
@@ -4655,17 +4577,10 @@
         <p:cNvGrpSpPr/>
         <p:nvPr/>
       </p:nvGrpSpPr>
-      <p:grpSpPr>
-        <a:xfrm>
-          <a:off x="0" y="0"/>
-          <a:ext cx="0" cy="0"/>
-          <a:chOff x="0" y="0"/>
-          <a:chExt cx="0" cy="0"/>
-        </a:xfrm>
-      </p:grpSpPr>
+      <p:grpSpPr/>
       <p:pic>
         <p:nvPicPr>
-          <p:cNvPr id="2" name="Picture 1" descr="images.png"/>
+          <p:cNvPr id="2" name="Picture 1" descr="logo.png"/>
           <p:cNvPicPr>
             <a:picLocks noChangeAspect="1"/>
           </p:cNvPicPr>
@@ -4727,7 +4642,6 @@
           <a:lstStyle/>
           <a:p>
             <a:pPr algn="ctr"/>
-            <a:endParaRPr/>
           </a:p>
         </p:txBody>
       </p:sp>
@@ -4806,7 +4720,6 @@
           <a:lstStyle/>
           <a:p>
             <a:pPr algn="ctr"/>
-            <a:endParaRPr/>
           </a:p>
         </p:txBody>
       </p:sp>
@@ -4848,7 +4761,7 @@
           </a:fontRef>
         </p:style>
         <p:txBody>
-          <a:bodyPr wrap="square" lIns="137160" tIns="91440" rtlCol="0" anchor="ctr"/>
+          <a:bodyPr rtlCol="0" anchor="ctr" wrap="square" lIns="137160" tIns="91440"/>
           <a:lstStyle/>
           <a:p>
             <a:pPr algn="ctr">
@@ -4952,7 +4865,7 @@
           </a:fontRef>
         </p:style>
         <p:txBody>
-          <a:bodyPr wrap="square" lIns="137160" tIns="91440" rtlCol="0" anchor="ctr"/>
+          <a:bodyPr rtlCol="0" anchor="ctr" wrap="square" lIns="137160" tIns="91440"/>
           <a:lstStyle/>
           <a:p>
             <a:pPr algn="ctr">
@@ -5130,7 +5043,7 @@
 </file>
 
 <file path=ppt/slides/slide12.xml><?xml version="1.0" encoding="utf-8"?>
-<p:sld xmlns:a="http://schemas.openxmlformats.org/drawingml/2006/main" xmlns:r="http://schemas.openxmlformats.org/officeDocument/2006/relationships" xmlns:p="http://schemas.openxmlformats.org/presentationml/2006/main">
+<p:sld xmlns:a="http://schemas.openxmlformats.org/drawingml/2006/main" xmlns:p="http://schemas.openxmlformats.org/presentationml/2006/main" xmlns:r="http://schemas.openxmlformats.org/officeDocument/2006/relationships">
   <p:cSld>
     <p:bg>
       <p:bgPr>
@@ -5146,17 +5059,10 @@
         <p:cNvGrpSpPr/>
         <p:nvPr/>
       </p:nvGrpSpPr>
-      <p:grpSpPr>
-        <a:xfrm>
-          <a:off x="0" y="0"/>
-          <a:ext cx="0" cy="0"/>
-          <a:chOff x="0" y="0"/>
-          <a:chExt cx="0" cy="0"/>
-        </a:xfrm>
-      </p:grpSpPr>
+      <p:grpSpPr/>
       <p:pic>
         <p:nvPicPr>
-          <p:cNvPr id="2" name="Picture 1" descr="images.png"/>
+          <p:cNvPr id="2" name="Picture 1" descr="logo.png"/>
           <p:cNvPicPr>
             <a:picLocks noChangeAspect="1"/>
           </p:cNvPicPr>
@@ -5218,7 +5124,6 @@
           <a:lstStyle/>
           <a:p>
             <a:pPr algn="ctr"/>
-            <a:endParaRPr/>
           </a:p>
         </p:txBody>
       </p:sp>
@@ -5230,8 +5135,8 @@
         </p:nvSpPr>
         <p:spPr>
           <a:xfrm>
-            <a:off x="731520" y="274320"/>
-            <a:ext cx="10058400" cy="548640"/>
+            <a:off x="731520" y="228600"/>
+            <a:ext cx="10058400" cy="502920"/>
           </a:xfrm>
           <a:prstGeom prst="rect">
             <a:avLst/>
@@ -5245,6 +5150,992 @@
           <a:lstStyle/>
           <a:p>
             <a:pPr algn="l">
+              <a:defRPr sz="2600" b="1">
+                <a:solidFill>
+                  <a:srgbClr val="1B5E6B"/>
+                </a:solidFill>
+              </a:defRPr>
+            </a:pPr>
+            <a:r>
+              <a:t>2030 Strategic Scenarios &amp; Project Limitations</a:t>
+            </a:r>
+          </a:p>
+        </p:txBody>
+      </p:sp>
+      <p:sp>
+        <p:nvSpPr>
+          <p:cNvPr id="5" name="Rectangle 4"/>
+          <p:cNvSpPr/>
+          <p:nvPr/>
+        </p:nvSpPr>
+        <p:spPr>
+          <a:xfrm>
+            <a:off x="731520" y="749808"/>
+            <a:ext cx="1645920" cy="54864"/>
+          </a:xfrm>
+          <a:prstGeom prst="rect">
+            <a:avLst/>
+          </a:prstGeom>
+          <a:solidFill>
+            <a:srgbClr val="C5A55A"/>
+          </a:solidFill>
+          <a:ln>
+            <a:noFill/>
+          </a:ln>
+        </p:spPr>
+        <p:style>
+          <a:lnRef idx="1">
+            <a:schemeClr val="accent1"/>
+          </a:lnRef>
+          <a:fillRef idx="3">
+            <a:schemeClr val="accent1"/>
+          </a:fillRef>
+          <a:effectRef idx="2">
+            <a:schemeClr val="accent1"/>
+          </a:effectRef>
+          <a:fontRef idx="minor">
+            <a:schemeClr val="lt1"/>
+          </a:fontRef>
+        </p:style>
+        <p:txBody>
+          <a:bodyPr rtlCol="0" anchor="ctr"/>
+          <a:lstStyle/>
+          <a:p>
+            <a:pPr algn="ctr"/>
+          </a:p>
+        </p:txBody>
+      </p:sp>
+      <p:sp>
+        <p:nvSpPr>
+          <p:cNvPr id="6" name="TextBox 5"/>
+          <p:cNvSpPr txBox="1"/>
+          <p:nvPr/>
+        </p:nvSpPr>
+        <p:spPr>
+          <a:xfrm>
+            <a:off x="548640" y="868680"/>
+            <a:ext cx="6217920" cy="274320"/>
+          </a:xfrm>
+          <a:prstGeom prst="rect">
+            <a:avLst/>
+          </a:prstGeom>
+          <a:noFill/>
+        </p:spPr>
+        <p:txBody>
+          <a:bodyPr wrap="square">
+            <a:spAutoFit/>
+          </a:bodyPr>
+          <a:lstStyle/>
+          <a:p>
+            <a:pPr algn="l">
+              <a:defRPr sz="1100" b="1">
+                <a:solidFill>
+                  <a:srgbClr val="1B5E6B"/>
+                </a:solidFill>
+              </a:defRPr>
+            </a:pPr>
+            <a:r>
+              <a:t>Strategic 2030 Capacity Scenarios (Heuristic Bounds, NOT an ML Forecast)</a:t>
+            </a:r>
+          </a:p>
+        </p:txBody>
+      </p:sp>
+      <p:graphicFrame>
+        <p:nvGraphicFramePr>
+          <p:cNvPr id="7" name="Table 6"/>
+          <p:cNvGraphicFramePr>
+            <a:graphicFrameLocks noGrp="1"/>
+          </p:cNvGraphicFramePr>
+          <p:nvPr/>
+        </p:nvGraphicFramePr>
+        <p:xfrm>
+          <a:off x="548640" y="1143000"/>
+          <a:ext cx="6217920" cy="1280160"/>
+        </p:xfrm>
+        <a:graphic>
+          <a:graphicData uri="http://schemas.openxmlformats.org/drawingml/2006/table">
+            <a:tbl>
+              <a:tblPr firstRow="1" bandRow="1">
+                <a:tableStyleId>{5C22544A-7EE6-4342-B048-85BDC9FD1C3A}</a:tableStyleId>
+              </a:tblPr>
+              <a:tblGrid>
+                <a:gridCol w="2072640"/>
+                <a:gridCol w="2072640"/>
+                <a:gridCol w="2072640"/>
+              </a:tblGrid>
+              <a:tr h="320040">
+                <a:tc>
+                  <a:txBody>
+                    <a:bodyPr/>
+                    <a:lstStyle/>
+                    <a:p>
+                      <a:pPr algn="ctr">
+                        <a:defRPr b="1" sz="1100">
+                          <a:solidFill>
+                            <a:srgbClr val="FFFFFF"/>
+                          </a:solidFill>
+                        </a:defRPr>
+                      </a:pPr>
+                      <a:r>
+                        <a:t>Scenario</a:t>
+                      </a:r>
+                    </a:p>
+                  </a:txBody>
+                  <a:tcPr>
+                    <a:solidFill>
+                      <a:srgbClr val="1B5E6B"/>
+                    </a:solidFill>
+                  </a:tcPr>
+                </a:tc>
+                <a:tc>
+                  <a:txBody>
+                    <a:bodyPr/>
+                    <a:lstStyle/>
+                    <a:p>
+                      <a:pPr algn="ctr">
+                        <a:defRPr b="1" sz="1100">
+                          <a:solidFill>
+                            <a:srgbClr val="FFFFFF"/>
+                          </a:solidFill>
+                        </a:defRPr>
+                      </a:pPr>
+                      <a:r>
+                        <a:t>Growth Assumption</a:t>
+                      </a:r>
+                    </a:p>
+                  </a:txBody>
+                  <a:tcPr>
+                    <a:solidFill>
+                      <a:srgbClr val="1B5E6B"/>
+                    </a:solidFill>
+                  </a:tcPr>
+                </a:tc>
+                <a:tc>
+                  <a:txBody>
+                    <a:bodyPr/>
+                    <a:lstStyle/>
+                    <a:p>
+                      <a:pPr algn="ctr">
+                        <a:defRPr b="1" sz="1100">
+                          <a:solidFill>
+                            <a:srgbClr val="FFFFFF"/>
+                          </a:solidFill>
+                        </a:defRPr>
+                      </a:pPr>
+                      <a:r>
+                        <a:t>Structural Driver / Risk Profile</a:t>
+                      </a:r>
+                    </a:p>
+                  </a:txBody>
+                  <a:tcPr>
+                    <a:solidFill>
+                      <a:srgbClr val="1B5E6B"/>
+                    </a:solidFill>
+                  </a:tcPr>
+                </a:tc>
+              </a:tr>
+              <a:tr h="320040">
+                <a:tc>
+                  <a:txBody>
+                    <a:bodyPr/>
+                    <a:lstStyle/>
+                    <a:p>
+                      <a:pPr algn="ctr">
+                        <a:defRPr sz="950" b="0">
+                          <a:solidFill>
+                            <a:srgbClr val="1F2937"/>
+                          </a:solidFill>
+                        </a:defRPr>
+                      </a:pPr>
+                      <a:r>
+                        <a:t>Bear Case</a:t>
+                      </a:r>
+                    </a:p>
+                  </a:txBody>
+                  <a:tcPr/>
+                </a:tc>
+                <a:tc>
+                  <a:txBody>
+                    <a:bodyPr/>
+                    <a:lstStyle/>
+                    <a:p>
+                      <a:pPr algn="ctr">
+                        <a:defRPr sz="950" b="0">
+                          <a:solidFill>
+                            <a:srgbClr val="1F2937"/>
+                          </a:solidFill>
+                        </a:defRPr>
+                      </a:pPr>
+                      <a:r>
+                        <a:t>5% YoY</a:t>
+                      </a:r>
+                    </a:p>
+                  </a:txBody>
+                  <a:tcPr/>
+                </a:tc>
+                <a:tc>
+                  <a:txBody>
+                    <a:bodyPr/>
+                    <a:lstStyle/>
+                    <a:p>
+                      <a:pPr algn="l">
+                        <a:defRPr sz="950" b="0">
+                          <a:solidFill>
+                            <a:srgbClr val="1F2937"/>
+                          </a:solidFill>
+                        </a:defRPr>
+                      </a:pPr>
+                      <a:r>
+                        <a:t>GPU commoditization, enterprise AI monetization plateau</a:t>
+                      </a:r>
+                    </a:p>
+                  </a:txBody>
+                  <a:tcPr/>
+                </a:tc>
+              </a:tr>
+              <a:tr h="320040">
+                <a:tc>
+                  <a:txBody>
+                    <a:bodyPr/>
+                    <a:lstStyle/>
+                    <a:p>
+                      <a:pPr algn="ctr">
+                        <a:defRPr sz="950" b="0">
+                          <a:solidFill>
+                            <a:srgbClr val="1F2937"/>
+                          </a:solidFill>
+                        </a:defRPr>
+                      </a:pPr>
+                      <a:r>
+                        <a:t>Base Case</a:t>
+                      </a:r>
+                    </a:p>
+                  </a:txBody>
+                  <a:tcPr/>
+                </a:tc>
+                <a:tc>
+                  <a:txBody>
+                    <a:bodyPr/>
+                    <a:lstStyle/>
+                    <a:p>
+                      <a:pPr algn="ctr">
+                        <a:defRPr sz="950" b="0">
+                          <a:solidFill>
+                            <a:srgbClr val="1F2937"/>
+                          </a:solidFill>
+                        </a:defRPr>
+                      </a:pPr>
+                      <a:r>
+                        <a:t>15% YoY</a:t>
+                      </a:r>
+                    </a:p>
+                  </a:txBody>
+                  <a:tcPr/>
+                </a:tc>
+                <a:tc>
+                  <a:txBody>
+                    <a:bodyPr/>
+                    <a:lstStyle/>
+                    <a:p>
+                      <a:pPr algn="l">
+                        <a:defRPr sz="950" b="0">
+                          <a:solidFill>
+                            <a:srgbClr val="1F2937"/>
+                          </a:solidFill>
+                        </a:defRPr>
+                      </a:pPr>
+                      <a:r>
+                        <a:t>Steady cloud migration + moderate GenAI workload capture</a:t>
+                      </a:r>
+                    </a:p>
+                  </a:txBody>
+                  <a:tcPr/>
+                </a:tc>
+              </a:tr>
+              <a:tr h="320040">
+                <a:tc>
+                  <a:txBody>
+                    <a:bodyPr/>
+                    <a:lstStyle/>
+                    <a:p>
+                      <a:pPr algn="ctr">
+                        <a:defRPr sz="950" b="0">
+                          <a:solidFill>
+                            <a:srgbClr val="1F2937"/>
+                          </a:solidFill>
+                        </a:defRPr>
+                      </a:pPr>
+                      <a:r>
+                        <a:t>Bull Case</a:t>
+                      </a:r>
+                    </a:p>
+                  </a:txBody>
+                  <a:tcPr/>
+                </a:tc>
+                <a:tc>
+                  <a:txBody>
+                    <a:bodyPr/>
+                    <a:lstStyle/>
+                    <a:p>
+                      <a:pPr algn="ctr">
+                        <a:defRPr sz="950" b="0">
+                          <a:solidFill>
+                            <a:srgbClr val="1F2937"/>
+                          </a:solidFill>
+                        </a:defRPr>
+                      </a:pPr>
+                      <a:r>
+                        <a:t>30% YoY</a:t>
+                      </a:r>
+                    </a:p>
+                  </a:txBody>
+                  <a:tcPr/>
+                </a:tc>
+                <a:tc>
+                  <a:txBody>
+                    <a:bodyPr/>
+                    <a:lstStyle/>
+                    <a:p>
+                      <a:pPr algn="l">
+                        <a:defRPr sz="950" b="0">
+                          <a:solidFill>
+                            <a:srgbClr val="1F2937"/>
+                          </a:solidFill>
+                        </a:defRPr>
+                      </a:pPr>
+                      <a:r>
+                        <a:t>Transformative enterprise agentic AI + sovereign cloud demand</a:t>
+                      </a:r>
+                    </a:p>
+                  </a:txBody>
+                  <a:tcPr/>
+                </a:tc>
+              </a:tr>
+            </a:tbl>
+          </a:graphicData>
+        </a:graphic>
+      </p:graphicFrame>
+      <p:sp>
+        <p:nvSpPr>
+          <p:cNvPr id="8" name="Rounded Rectangle 7"/>
+          <p:cNvSpPr/>
+          <p:nvPr/>
+        </p:nvSpPr>
+        <p:spPr>
+          <a:xfrm>
+            <a:off x="6949440" y="960120"/>
+            <a:ext cx="4709160" cy="1463040"/>
+          </a:xfrm>
+          <a:prstGeom prst="roundRect">
+            <a:avLst/>
+          </a:prstGeom>
+          <a:solidFill>
+            <a:srgbClr val="F0FDFA"/>
+          </a:solidFill>
+          <a:ln w="19050">
+            <a:solidFill>
+              <a:srgbClr val="1B5E6B"/>
+            </a:solidFill>
+          </a:ln>
+        </p:spPr>
+        <p:style>
+          <a:lnRef idx="1">
+            <a:schemeClr val="accent1"/>
+          </a:lnRef>
+          <a:fillRef idx="3">
+            <a:schemeClr val="accent1"/>
+          </a:fillRef>
+          <a:effectRef idx="2">
+            <a:schemeClr val="accent1"/>
+          </a:effectRef>
+          <a:fontRef idx="minor">
+            <a:schemeClr val="lt1"/>
+          </a:fontRef>
+        </p:style>
+        <p:txBody>
+          <a:bodyPr rtlCol="0" anchor="ctr" wrap="square" lIns="137160" rIns="137160" tIns="73152"/>
+          <a:lstStyle/>
+          <a:p>
+            <a:pPr algn="ctr">
+              <a:defRPr sz="1100" b="1">
+                <a:solidFill>
+                  <a:srgbClr val="1B5E6B"/>
+                </a:solidFill>
+              </a:defRPr>
+            </a:pPr>
+            <a:r>
+              <a:t>Why Can't the Model Predict to 2030?</a:t>
+            </a:r>
+          </a:p>
+          <a:p>
+            <a:pPr>
+              <a:spcBef>
+                <a:spcPts val="200"/>
+              </a:spcBef>
+              <a:defRPr sz="950">
+                <a:solidFill>
+                  <a:srgbClr val="1F2937"/>
+                </a:solidFill>
+              </a:defRPr>
+            </a:pPr>
+            <a:r>
+              <a:t>•  1-Quarter Horizon Limit (h=1): Models were strictly validated for 1Q-ahead. Iterative 16-20Q projections suffer fatal recursive error compounding.</a:t>
+            </a:r>
+          </a:p>
+          <a:p>
+            <a:pPr>
+              <a:spcBef>
+                <a:spcPts val="200"/>
+              </a:spcBef>
+              <a:defRPr sz="950">
+                <a:solidFill>
+                  <a:srgbClr val="1F2937"/>
+                </a:solidFill>
+              </a:defRPr>
+            </a:pPr>
+            <a:r>
+              <a:t>•  Zero Capex Predictive Signal: Regularization shrinks all capex lags to 0.000 — no empirical basis exists for multi-year ML extrapolation.</a:t>
+            </a:r>
+          </a:p>
+          <a:p>
+            <a:pPr>
+              <a:spcBef>
+                <a:spcPts val="200"/>
+              </a:spcBef>
+              <a:defRPr sz="950">
+                <a:solidFill>
+                  <a:srgbClr val="1F2937"/>
+                </a:solidFill>
+              </a:defRPr>
+            </a:pPr>
+            <a:r>
+              <a:t>•  Role of 2030 Numbers: Heuristic compounding stress-test for capacity downside planning, explicitly NOT a statistical model prediction.</a:t>
+            </a:r>
+          </a:p>
+        </p:txBody>
+      </p:sp>
+      <p:sp>
+        <p:nvSpPr>
+          <p:cNvPr id="9" name="Rounded Rectangle 8"/>
+          <p:cNvSpPr/>
+          <p:nvPr/>
+        </p:nvSpPr>
+        <p:spPr>
+          <a:xfrm>
+            <a:off x="548640" y="2560320"/>
+            <a:ext cx="5440680" cy="2697480"/>
+          </a:xfrm>
+          <a:prstGeom prst="roundRect">
+            <a:avLst/>
+          </a:prstGeom>
+          <a:solidFill>
+            <a:srgbClr val="F8FAFC"/>
+          </a:solidFill>
+          <a:ln w="19050">
+            <a:solidFill>
+              <a:srgbClr val="1B5E6B"/>
+            </a:solidFill>
+          </a:ln>
+        </p:spPr>
+        <p:style>
+          <a:lnRef idx="1">
+            <a:schemeClr val="accent1"/>
+          </a:lnRef>
+          <a:fillRef idx="3">
+            <a:schemeClr val="accent1"/>
+          </a:fillRef>
+          <a:effectRef idx="2">
+            <a:schemeClr val="accent1"/>
+          </a:effectRef>
+          <a:fontRef idx="minor">
+            <a:schemeClr val="lt1"/>
+          </a:fontRef>
+        </p:style>
+        <p:txBody>
+          <a:bodyPr rtlCol="0" anchor="ctr" wrap="square" lIns="137160" rIns="137160" tIns="73152"/>
+          <a:lstStyle/>
+          <a:p>
+            <a:pPr algn="ctr">
+              <a:defRPr sz="1200" b="1">
+                <a:solidFill>
+                  <a:srgbClr val="1B5E6B"/>
+                </a:solidFill>
+              </a:defRPr>
+            </a:pPr>
+            <a:r>
+              <a:t>Technical &amp; Methodological Limitations</a:t>
+            </a:r>
+          </a:p>
+          <a:p>
+            <a:pPr>
+              <a:spcBef>
+                <a:spcPts val="300"/>
+              </a:spcBef>
+              <a:defRPr sz="950">
+                <a:solidFill>
+                  <a:srgbClr val="1F2937"/>
+                </a:solidFill>
+              </a:defRPr>
+            </a:pPr>
+            <a:r>
+              <a:t>•  Short Forecast Horizon (h=1Q): Validated solely for 1-step ahead; cannot project long-term horizons (2030) without exponential error drift.</a:t>
+            </a:r>
+          </a:p>
+          <a:p>
+            <a:pPr>
+              <a:spcBef>
+                <a:spcPts val="300"/>
+              </a:spcBef>
+              <a:defRPr sz="950">
+                <a:solidFill>
+                  <a:srgbClr val="1F2937"/>
+                </a:solidFill>
+              </a:defRPr>
+            </a:pPr>
+            <a:r>
+              <a:t>•  Small Sample Size (N=98 clean): Quarterly panel (GOOGL n=22, MSFT n=40, AMZN n=46) limits complex non-linear training; XGBoost overfits validation.</a:t>
+            </a:r>
+          </a:p>
+          <a:p>
+            <a:pPr>
+              <a:spcBef>
+                <a:spcPts val="300"/>
+              </a:spcBef>
+              <a:defRPr sz="950">
+                <a:solidFill>
+                  <a:srgbClr val="1F2937"/>
+                </a:solidFill>
+              </a:defRPr>
+            </a:pPr>
+            <a:r>
+              <a:t>•  Aggregated Capex Data: SEC 10-K/Q filings combine AI datacenter chips with real estate, office hardware, and retail logistics (no pure AI capex).</a:t>
+            </a:r>
+          </a:p>
+          <a:p>
+            <a:pPr>
+              <a:spcBef>
+                <a:spcPts val="300"/>
+              </a:spcBef>
+              <a:defRPr sz="950">
+                <a:solidFill>
+                  <a:srgbClr val="1F2937"/>
+                </a:solidFill>
+              </a:defRPr>
+            </a:pPr>
+            <a:r>
+              <a:t>•  Accounting Recasts: MSFT FY24/25 segment restatement creates structural breaks requiring manual same-vintage reconciliation.</a:t>
+            </a:r>
+          </a:p>
+          <a:p>
+            <a:pPr>
+              <a:spcBef>
+                <a:spcPts val="300"/>
+              </a:spcBef>
+              <a:defRPr sz="950">
+                <a:solidFill>
+                  <a:srgbClr val="1F2937"/>
+                </a:solidFill>
+              </a:defRPr>
+            </a:pPr>
+            <a:r>
+              <a:t>•  Target Metric Definition: Target is growth change (Delta YoY, can be &lt;= 0), making MAPE mathematically undefined; evaluation relies strictly on RMSE.</a:t>
+            </a:r>
+          </a:p>
+        </p:txBody>
+      </p:sp>
+      <p:sp>
+        <p:nvSpPr>
+          <p:cNvPr id="10" name="Rounded Rectangle 9"/>
+          <p:cNvSpPr/>
+          <p:nvPr/>
+        </p:nvSpPr>
+        <p:spPr>
+          <a:xfrm>
+            <a:off x="6217920" y="2560320"/>
+            <a:ext cx="5440680" cy="2697480"/>
+          </a:xfrm>
+          <a:prstGeom prst="roundRect">
+            <a:avLst/>
+          </a:prstGeom>
+          <a:solidFill>
+            <a:srgbClr val="FFFBEB"/>
+          </a:solidFill>
+          <a:ln w="19050">
+            <a:solidFill>
+              <a:srgbClr val="C5A55A"/>
+            </a:solidFill>
+          </a:ln>
+        </p:spPr>
+        <p:style>
+          <a:lnRef idx="1">
+            <a:schemeClr val="accent1"/>
+          </a:lnRef>
+          <a:fillRef idx="3">
+            <a:schemeClr val="accent1"/>
+          </a:fillRef>
+          <a:effectRef idx="2">
+            <a:schemeClr val="accent1"/>
+          </a:effectRef>
+          <a:fontRef idx="minor">
+            <a:schemeClr val="lt1"/>
+          </a:fontRef>
+        </p:style>
+        <p:txBody>
+          <a:bodyPr rtlCol="0" anchor="ctr" wrap="square" lIns="137160" rIns="137160" tIns="73152"/>
+          <a:lstStyle/>
+          <a:p>
+            <a:pPr algn="ctr">
+              <a:defRPr sz="1200" b="1">
+                <a:solidFill>
+                  <a:srgbClr val="1B5E6B"/>
+                </a:solidFill>
+              </a:defRPr>
+            </a:pPr>
+            <a:r>
+              <a:t>Business &amp; Decision-Making Limitations</a:t>
+            </a:r>
+          </a:p>
+          <a:p>
+            <a:pPr>
+              <a:spcBef>
+                <a:spcPts val="300"/>
+              </a:spcBef>
+              <a:defRPr sz="950">
+                <a:solidFill>
+                  <a:srgbClr val="1F2937"/>
+                </a:solidFill>
+              </a:defRPr>
+            </a:pPr>
+            <a:r>
+              <a:t>•  No Short-Term Guidance Signal: Capex guidance announcements cannot serve as an early indicator to revise 1Q-ahead cloud revenue forecasts.</a:t>
+            </a:r>
+          </a:p>
+          <a:p>
+            <a:pPr>
+              <a:spcBef>
+                <a:spcPts val="300"/>
+              </a:spcBef>
+              <a:defRPr sz="950">
+                <a:solidFill>
+                  <a:srgbClr val="1F2937"/>
+                </a:solidFill>
+              </a:defRPr>
+            </a:pPr>
+            <a:r>
+              <a:t>•  Multi-Year Gestation Lag: Datacenter construction, utility power permits, and cluster setups take 2–4+ years before generating billable customer revenue.</a:t>
+            </a:r>
+          </a:p>
+          <a:p>
+            <a:pPr>
+              <a:spcBef>
+                <a:spcPts val="300"/>
+              </a:spcBef>
+              <a:defRPr sz="950">
+                <a:solidFill>
+                  <a:srgbClr val="1F2937"/>
+                </a:solidFill>
+              </a:defRPr>
+            </a:pPr>
+            <a:r>
+              <a:t>•  Internal R&amp;D Absorption: Significant AI capex feeds proprietary foundation models (Gemini, Copilot, Llama), not third-party cloud segment billing.</a:t>
+            </a:r>
+          </a:p>
+          <a:p>
+            <a:pPr>
+              <a:spcBef>
+                <a:spcPts val="300"/>
+              </a:spcBef>
+              <a:defRPr sz="950">
+                <a:solidFill>
+                  <a:srgbClr val="1F2937"/>
+                </a:solidFill>
+              </a:defRPr>
+            </a:pPr>
+            <a:r>
+              <a:t>•  Non-Causal Relationship: Findings show predictive independence, not causal absence; macroeconomic IT budgets and interest rates dominate.</a:t>
+            </a:r>
+          </a:p>
+          <a:p>
+            <a:pPr>
+              <a:spcBef>
+                <a:spcPts val="300"/>
+              </a:spcBef>
+              <a:defRPr sz="950">
+                <a:solidFill>
+                  <a:srgbClr val="1F2937"/>
+                </a:solidFill>
+              </a:defRPr>
+            </a:pPr>
+            <a:r>
+              <a:t>•  Unfit for 2030 Capital Commitments: Model cannot justify $50B+ multi-year capex outlays; requires modular tranche-based leasing and RPO monitoring.</a:t>
+            </a:r>
+          </a:p>
+        </p:txBody>
+      </p:sp>
+      <p:sp>
+        <p:nvSpPr>
+          <p:cNvPr id="11" name="Rectangle 10"/>
+          <p:cNvSpPr/>
+          <p:nvPr/>
+        </p:nvSpPr>
+        <p:spPr>
+          <a:xfrm>
+            <a:off x="0" y="5394960"/>
+            <a:ext cx="12191695" cy="1143000"/>
+          </a:xfrm>
+          <a:prstGeom prst="rect">
+            <a:avLst/>
+          </a:prstGeom>
+          <a:solidFill>
+            <a:srgbClr val="1B5E6B"/>
+          </a:solidFill>
+          <a:ln>
+            <a:noFill/>
+          </a:ln>
+        </p:spPr>
+        <p:style>
+          <a:lnRef idx="1">
+            <a:schemeClr val="accent1"/>
+          </a:lnRef>
+          <a:fillRef idx="3">
+            <a:schemeClr val="accent1"/>
+          </a:fillRef>
+          <a:effectRef idx="2">
+            <a:schemeClr val="accent1"/>
+          </a:effectRef>
+          <a:fontRef idx="minor">
+            <a:schemeClr val="lt1"/>
+          </a:fontRef>
+        </p:style>
+        <p:txBody>
+          <a:bodyPr rtlCol="0" anchor="ctr"/>
+          <a:lstStyle/>
+          <a:p>
+            <a:pPr algn="ctr"/>
+          </a:p>
+        </p:txBody>
+      </p:sp>
+      <p:sp>
+        <p:nvSpPr>
+          <p:cNvPr id="12" name="TextBox 11"/>
+          <p:cNvSpPr txBox="1"/>
+          <p:nvPr/>
+        </p:nvSpPr>
+        <p:spPr>
+          <a:xfrm>
+            <a:off x="731520" y="5468112"/>
+            <a:ext cx="10698480" cy="347472"/>
+          </a:xfrm>
+          <a:prstGeom prst="rect">
+            <a:avLst/>
+          </a:prstGeom>
+          <a:noFill/>
+        </p:spPr>
+        <p:txBody>
+          <a:bodyPr wrap="square">
+            <a:spAutoFit/>
+          </a:bodyPr>
+          <a:lstStyle/>
+          <a:p>
+            <a:pPr algn="ctr">
+              <a:defRPr sz="2000" b="1">
+                <a:solidFill>
+                  <a:srgbClr val="FFFFFF"/>
+                </a:solidFill>
+              </a:defRPr>
+            </a:pPr>
+            <a:r>
+              <a:t>Thank You — Questions &amp; Discussion</a:t>
+            </a:r>
+          </a:p>
+        </p:txBody>
+      </p:sp>
+      <p:sp>
+        <p:nvSpPr>
+          <p:cNvPr id="13" name="TextBox 12"/>
+          <p:cNvSpPr txBox="1"/>
+          <p:nvPr/>
+        </p:nvSpPr>
+        <p:spPr>
+          <a:xfrm>
+            <a:off x="731520" y="5833872"/>
+            <a:ext cx="10698480" cy="256032"/>
+          </a:xfrm>
+          <a:prstGeom prst="rect">
+            <a:avLst/>
+          </a:prstGeom>
+          <a:noFill/>
+        </p:spPr>
+        <p:txBody>
+          <a:bodyPr wrap="square">
+            <a:spAutoFit/>
+          </a:bodyPr>
+          <a:lstStyle/>
+          <a:p>
+            <a:pPr algn="ctr">
+              <a:defRPr sz="1050" b="1">
+                <a:solidFill>
+                  <a:srgbClr val="C5A55A"/>
+                </a:solidFill>
+              </a:defRPr>
+            </a:pPr>
+            <a:r>
+              <a:t>Recommended Next Steps: Datacenter power filings • Cluster-level GPU utilization tracking • 4–8Q multi-year lag modeling</a:t>
+            </a:r>
+          </a:p>
+        </p:txBody>
+      </p:sp>
+      <p:sp>
+        <p:nvSpPr>
+          <p:cNvPr id="14" name="TextBox 13"/>
+          <p:cNvSpPr txBox="1"/>
+          <p:nvPr/>
+        </p:nvSpPr>
+        <p:spPr>
+          <a:xfrm>
+            <a:off x="731520" y="6108192"/>
+            <a:ext cx="10698480" cy="228600"/>
+          </a:xfrm>
+          <a:prstGeom prst="rect">
+            <a:avLst/>
+          </a:prstGeom>
+          <a:noFill/>
+        </p:spPr>
+        <p:txBody>
+          <a:bodyPr wrap="square">
+            <a:spAutoFit/>
+          </a:bodyPr>
+          <a:lstStyle/>
+          <a:p>
+            <a:pPr algn="ctr">
+              <a:defRPr sz="950" b="0">
+                <a:solidFill>
+                  <a:srgbClr val="E5E7EB"/>
+                </a:solidFill>
+              </a:defRPr>
+            </a:pPr>
+            <a:r>
+              <a:t>Cakrawala University • Predictive Analytics (Meeting 14 &amp; Technical Interview) • Tita Noviana (40%) • Suci Fransisca Sisilia R (40%) • Nadira Dika Kaivalya (20%)</a:t>
+            </a:r>
+          </a:p>
+        </p:txBody>
+      </p:sp>
+    </p:spTree>
+  </p:cSld>
+  <p:clrMapOvr>
+    <a:masterClrMapping/>
+  </p:clrMapOvr>
+</p:sld>
+</file>
+
+<file path=ppt/slides/slide2.xml><?xml version="1.0" encoding="utf-8"?>
+<p:sld xmlns:a="http://schemas.openxmlformats.org/drawingml/2006/main" xmlns:p="http://schemas.openxmlformats.org/presentationml/2006/main" xmlns:r="http://schemas.openxmlformats.org/officeDocument/2006/relationships">
+  <p:cSld>
+    <p:bg>
+      <p:bgPr>
+        <a:solidFill>
+          <a:srgbClr val="FFFFFF"/>
+        </a:solidFill>
+        <a:effectLst/>
+      </p:bgPr>
+    </p:bg>
+    <p:spTree>
+      <p:nvGrpSpPr>
+        <p:cNvPr id="1" name=""/>
+        <p:cNvGrpSpPr/>
+        <p:nvPr/>
+      </p:nvGrpSpPr>
+      <p:grpSpPr/>
+      <p:pic>
+        <p:nvPicPr>
+          <p:cNvPr id="2" name="Picture 1" descr="logo.png"/>
+          <p:cNvPicPr>
+            <a:picLocks noChangeAspect="1"/>
+          </p:cNvPicPr>
+          <p:nvPr/>
+        </p:nvPicPr>
+        <p:blipFill>
+          <a:blip r:embed="rId2"/>
+          <a:stretch>
+            <a:fillRect/>
+          </a:stretch>
+        </p:blipFill>
+        <p:spPr>
+          <a:xfrm>
+            <a:off x="320040" y="228600"/>
+            <a:ext cx="548640" cy="548640"/>
+          </a:xfrm>
+          <a:prstGeom prst="rect">
+            <a:avLst/>
+          </a:prstGeom>
+        </p:spPr>
+      </p:pic>
+      <p:sp>
+        <p:nvSpPr>
+          <p:cNvPr id="3" name="Rectangle 2"/>
+          <p:cNvSpPr/>
+          <p:nvPr/>
+        </p:nvSpPr>
+        <p:spPr>
+          <a:xfrm>
+            <a:off x="0" y="6693408"/>
+            <a:ext cx="12191695" cy="164592"/>
+          </a:xfrm>
+          <a:prstGeom prst="rect">
+            <a:avLst/>
+          </a:prstGeom>
+          <a:solidFill>
+            <a:srgbClr val="1B5E6B"/>
+          </a:solidFill>
+          <a:ln>
+            <a:noFill/>
+          </a:ln>
+        </p:spPr>
+        <p:style>
+          <a:lnRef idx="1">
+            <a:schemeClr val="accent1"/>
+          </a:lnRef>
+          <a:fillRef idx="3">
+            <a:schemeClr val="accent1"/>
+          </a:fillRef>
+          <a:effectRef idx="2">
+            <a:schemeClr val="accent1"/>
+          </a:effectRef>
+          <a:fontRef idx="minor">
+            <a:schemeClr val="lt1"/>
+          </a:fontRef>
+        </p:style>
+        <p:txBody>
+          <a:bodyPr rtlCol="0" anchor="ctr"/>
+          <a:lstStyle/>
+          <a:p>
+            <a:pPr algn="ctr"/>
+          </a:p>
+        </p:txBody>
+      </p:sp>
+      <p:sp>
+        <p:nvSpPr>
+          <p:cNvPr id="4" name="TextBox 3"/>
+          <p:cNvSpPr txBox="1"/>
+          <p:nvPr/>
+        </p:nvSpPr>
+        <p:spPr>
+          <a:xfrm>
+            <a:off x="731520" y="274320"/>
+            <a:ext cx="7315200" cy="548640"/>
+          </a:xfrm>
+          <a:prstGeom prst="rect">
+            <a:avLst/>
+          </a:prstGeom>
+          <a:noFill/>
+        </p:spPr>
+        <p:txBody>
+          <a:bodyPr wrap="square">
+            <a:spAutoFit/>
+          </a:bodyPr>
+          <a:lstStyle/>
+          <a:p>
+            <a:pPr algn="l">
               <a:defRPr sz="2800" b="1">
                 <a:solidFill>
                   <a:srgbClr val="1B5E6B"/>
@@ -5252,7 +6143,7 @@
               </a:defRPr>
             </a:pPr>
             <a:r>
-              <a:t>2030 Scenarios, Limitations &amp; Next Steps</a:t>
+              <a:t>Presentation Outline</a:t>
             </a:r>
           </a:p>
         </p:txBody>
@@ -5297,7 +6188,6 @@
           <a:lstStyle/>
           <a:p>
             <a:pPr algn="ctr"/>
-            <a:endParaRPr/>
           </a:p>
         </p:txBody>
       </p:sp>
@@ -5309,8 +6199,8 @@
         </p:nvSpPr>
         <p:spPr>
           <a:xfrm>
-            <a:off x="731520" y="1005840"/>
-            <a:ext cx="10058400" cy="365760"/>
+            <a:off x="914400" y="1188720"/>
+            <a:ext cx="10058400" cy="5303520"/>
           </a:xfrm>
           <a:prstGeom prst="rect">
             <a:avLst/>
@@ -5323,401 +6213,18 @@
           </a:bodyPr>
           <a:lstStyle/>
           <a:p>
-            <a:pPr algn="l">
-              <a:defRPr sz="1300" b="1">
-                <a:solidFill>
-                  <a:srgbClr val="1B5E6B"/>
-                </a:solidFill>
-              </a:defRPr>
-            </a:pPr>
-            <a:r>
-              <a:t>Illustrative 2030 Cloud Revenue Scenarios (Explicit Assumptions, NOT ML Forecasts)</a:t>
-            </a:r>
-          </a:p>
-        </p:txBody>
-      </p:sp>
-      <p:graphicFrame>
-        <p:nvGraphicFramePr>
-          <p:cNvPr id="7" name="Table 6"/>
-          <p:cNvGraphicFramePr>
-            <a:graphicFrameLocks noGrp="1"/>
-          </p:cNvGraphicFramePr>
-          <p:nvPr/>
-        </p:nvGraphicFramePr>
-        <p:xfrm>
-          <a:off x="731520" y="1463040"/>
-          <a:ext cx="6400800" cy="1463040"/>
-        </p:xfrm>
-        <a:graphic>
-          <a:graphicData uri="http://schemas.openxmlformats.org/drawingml/2006/table">
-            <a:tbl>
-              <a:tblPr firstRow="1" bandRow="1">
-                <a:tableStyleId>{5C22544A-7EE6-4342-B048-85BDC9FD1C3A}</a:tableStyleId>
-              </a:tblPr>
-              <a:tblGrid>
-                <a:gridCol w="2133600">
-                  <a:extLst>
-                    <a:ext uri="{9D8B030D-6E8A-4147-A177-3AD203B41FA5}">
-                      <a16:colId xmlns:a16="http://schemas.microsoft.com/office/drawing/2014/main" val="20000"/>
-                    </a:ext>
-                  </a:extLst>
-                </a:gridCol>
-                <a:gridCol w="2133600">
-                  <a:extLst>
-                    <a:ext uri="{9D8B030D-6E8A-4147-A177-3AD203B41FA5}">
-                      <a16:colId xmlns:a16="http://schemas.microsoft.com/office/drawing/2014/main" val="20001"/>
-                    </a:ext>
-                  </a:extLst>
-                </a:gridCol>
-                <a:gridCol w="2133600">
-                  <a:extLst>
-                    <a:ext uri="{9D8B030D-6E8A-4147-A177-3AD203B41FA5}">
-                      <a16:colId xmlns:a16="http://schemas.microsoft.com/office/drawing/2014/main" val="20002"/>
-                    </a:ext>
-                  </a:extLst>
-                </a:gridCol>
-              </a:tblGrid>
-              <a:tr h="365760">
-                <a:tc>
-                  <a:txBody>
-                    <a:bodyPr/>
-                    <a:lstStyle/>
-                    <a:p>
-                      <a:pPr algn="ctr">
-                        <a:defRPr sz="1100" b="1">
-                          <a:solidFill>
-                            <a:srgbClr val="FFFFFF"/>
-                          </a:solidFill>
-                        </a:defRPr>
-                      </a:pPr>
-                      <a:r>
-                        <a:t>Scenario</a:t>
-                      </a:r>
-                    </a:p>
-                  </a:txBody>
-                  <a:tcPr>
-                    <a:solidFill>
-                      <a:srgbClr val="1B5E6B"/>
-                    </a:solidFill>
-                  </a:tcPr>
-                </a:tc>
-                <a:tc>
-                  <a:txBody>
-                    <a:bodyPr/>
-                    <a:lstStyle/>
-                    <a:p>
-                      <a:pPr algn="ctr">
-                        <a:defRPr sz="1100" b="1">
-                          <a:solidFill>
-                            <a:srgbClr val="FFFFFF"/>
-                          </a:solidFill>
-                        </a:defRPr>
-                      </a:pPr>
-                      <a:r>
-                        <a:t>Annual Growth Assumption</a:t>
-                      </a:r>
-                    </a:p>
-                  </a:txBody>
-                  <a:tcPr>
-                    <a:solidFill>
-                      <a:srgbClr val="1B5E6B"/>
-                    </a:solidFill>
-                  </a:tcPr>
-                </a:tc>
-                <a:tc>
-                  <a:txBody>
-                    <a:bodyPr/>
-                    <a:lstStyle/>
-                    <a:p>
-                      <a:pPr algn="ctr">
-                        <a:defRPr sz="1100" b="1">
-                          <a:solidFill>
-                            <a:srgbClr val="FFFFFF"/>
-                          </a:solidFill>
-                        </a:defRPr>
-                      </a:pPr>
-                      <a:r>
-                        <a:t>Risk Profile</a:t>
-                      </a:r>
-                    </a:p>
-                  </a:txBody>
-                  <a:tcPr>
-                    <a:solidFill>
-                      <a:srgbClr val="1B5E6B"/>
-                    </a:solidFill>
-                  </a:tcPr>
-                </a:tc>
-                <a:extLst>
-                  <a:ext uri="{0D108BD9-81ED-4DB2-BD59-A6C34878D82A}">
-                    <a16:rowId xmlns:a16="http://schemas.microsoft.com/office/drawing/2014/main" val="10000"/>
-                  </a:ext>
-                </a:extLst>
-              </a:tr>
-              <a:tr h="365760">
-                <a:tc>
-                  <a:txBody>
-                    <a:bodyPr/>
-                    <a:lstStyle/>
-                    <a:p>
-                      <a:pPr algn="ctr">
-                        <a:defRPr sz="1100" b="0">
-                          <a:solidFill>
-                            <a:srgbClr val="1F2937"/>
-                          </a:solidFill>
-                        </a:defRPr>
-                      </a:pPr>
-                      <a:r>
-                        <a:t>Bear Case</a:t>
-                      </a:r>
-                    </a:p>
-                  </a:txBody>
-                  <a:tcPr/>
-                </a:tc>
-                <a:tc>
-                  <a:txBody>
-                    <a:bodyPr/>
-                    <a:lstStyle/>
-                    <a:p>
-                      <a:pPr algn="ctr">
-                        <a:defRPr sz="1100" b="0">
-                          <a:solidFill>
-                            <a:srgbClr val="1F2937"/>
-                          </a:solidFill>
-                        </a:defRPr>
-                      </a:pPr>
-                      <a:r>
-                        <a:t>5% YoY</a:t>
-                      </a:r>
-                    </a:p>
-                  </a:txBody>
-                  <a:tcPr/>
-                </a:tc>
-                <a:tc>
-                  <a:txBody>
-                    <a:bodyPr/>
-                    <a:lstStyle/>
-                    <a:p>
-                      <a:pPr algn="l">
-                        <a:defRPr sz="1100" b="0">
-                          <a:solidFill>
-                            <a:srgbClr val="1F2937"/>
-                          </a:solidFill>
-                        </a:defRPr>
-                      </a:pPr>
-                      <a:r>
-                        <a:t>GPU commoditization, AI monetization plateau</a:t>
-                      </a:r>
-                    </a:p>
-                  </a:txBody>
-                  <a:tcPr/>
-                </a:tc>
-                <a:extLst>
-                  <a:ext uri="{0D108BD9-81ED-4DB2-BD59-A6C34878D82A}">
-                    <a16:rowId xmlns:a16="http://schemas.microsoft.com/office/drawing/2014/main" val="10001"/>
-                  </a:ext>
-                </a:extLst>
-              </a:tr>
-              <a:tr h="365760">
-                <a:tc>
-                  <a:txBody>
-                    <a:bodyPr/>
-                    <a:lstStyle/>
-                    <a:p>
-                      <a:pPr algn="ctr">
-                        <a:defRPr sz="1100" b="0">
-                          <a:solidFill>
-                            <a:srgbClr val="1F2937"/>
-                          </a:solidFill>
-                        </a:defRPr>
-                      </a:pPr>
-                      <a:r>
-                        <a:t>Base Case</a:t>
-                      </a:r>
-                    </a:p>
-                  </a:txBody>
-                  <a:tcPr/>
-                </a:tc>
-                <a:tc>
-                  <a:txBody>
-                    <a:bodyPr/>
-                    <a:lstStyle/>
-                    <a:p>
-                      <a:pPr algn="ctr">
-                        <a:defRPr sz="1100" b="0">
-                          <a:solidFill>
-                            <a:srgbClr val="1F2937"/>
-                          </a:solidFill>
-                        </a:defRPr>
-                      </a:pPr>
-                      <a:r>
-                        <a:t>15% YoY</a:t>
-                      </a:r>
-                    </a:p>
-                  </a:txBody>
-                  <a:tcPr/>
-                </a:tc>
-                <a:tc>
-                  <a:txBody>
-                    <a:bodyPr/>
-                    <a:lstStyle/>
-                    <a:p>
-                      <a:pPr algn="l">
-                        <a:defRPr sz="1100" b="0">
-                          <a:solidFill>
-                            <a:srgbClr val="1F2937"/>
-                          </a:solidFill>
-                        </a:defRPr>
-                      </a:pPr>
-                      <a:r>
-                        <a:t>Steady migration + moderate AI capture</a:t>
-                      </a:r>
-                    </a:p>
-                  </a:txBody>
-                  <a:tcPr/>
-                </a:tc>
-                <a:extLst>
-                  <a:ext uri="{0D108BD9-81ED-4DB2-BD59-A6C34878D82A}">
-                    <a16:rowId xmlns:a16="http://schemas.microsoft.com/office/drawing/2014/main" val="10002"/>
-                  </a:ext>
-                </a:extLst>
-              </a:tr>
-              <a:tr h="365760">
-                <a:tc>
-                  <a:txBody>
-                    <a:bodyPr/>
-                    <a:lstStyle/>
-                    <a:p>
-                      <a:pPr algn="ctr">
-                        <a:defRPr sz="1100" b="0">
-                          <a:solidFill>
-                            <a:srgbClr val="1F2937"/>
-                          </a:solidFill>
-                        </a:defRPr>
-                      </a:pPr>
-                      <a:r>
-                        <a:t>Bull Case</a:t>
-                      </a:r>
-                    </a:p>
-                  </a:txBody>
-                  <a:tcPr/>
-                </a:tc>
-                <a:tc>
-                  <a:txBody>
-                    <a:bodyPr/>
-                    <a:lstStyle/>
-                    <a:p>
-                      <a:pPr algn="ctr">
-                        <a:defRPr sz="1100" b="0">
-                          <a:solidFill>
-                            <a:srgbClr val="1F2937"/>
-                          </a:solidFill>
-                        </a:defRPr>
-                      </a:pPr>
-                      <a:r>
-                        <a:t>30% YoY</a:t>
-                      </a:r>
-                    </a:p>
-                  </a:txBody>
-                  <a:tcPr/>
-                </a:tc>
-                <a:tc>
-                  <a:txBody>
-                    <a:bodyPr/>
-                    <a:lstStyle/>
-                    <a:p>
-                      <a:pPr algn="l">
-                        <a:defRPr sz="1100" b="0">
-                          <a:solidFill>
-                            <a:srgbClr val="1F2937"/>
-                          </a:solidFill>
-                        </a:defRPr>
-                      </a:pPr>
-                      <a:r>
-                        <a:t>Transformative enterprise AI + sovereign cloud</a:t>
-                      </a:r>
-                    </a:p>
-                  </a:txBody>
-                  <a:tcPr/>
-                </a:tc>
-                <a:extLst>
-                  <a:ext uri="{0D108BD9-81ED-4DB2-BD59-A6C34878D82A}">
-                    <a16:rowId xmlns:a16="http://schemas.microsoft.com/office/drawing/2014/main" val="10003"/>
-                  </a:ext>
-                </a:extLst>
-              </a:tr>
-            </a:tbl>
-          </a:graphicData>
-        </a:graphic>
-      </p:graphicFrame>
-      <p:sp>
-        <p:nvSpPr>
-          <p:cNvPr id="8" name="TextBox 7"/>
-          <p:cNvSpPr txBox="1"/>
-          <p:nvPr/>
-        </p:nvSpPr>
-        <p:spPr>
-          <a:xfrm>
-            <a:off x="731520" y="3291840"/>
-            <a:ext cx="4572000" cy="365760"/>
-          </a:xfrm>
-          <a:prstGeom prst="rect">
-            <a:avLst/>
-          </a:prstGeom>
-          <a:noFill/>
-        </p:spPr>
-        <p:txBody>
-          <a:bodyPr wrap="square">
-            <a:spAutoFit/>
-          </a:bodyPr>
-          <a:lstStyle/>
-          <a:p>
-            <a:pPr algn="l">
-              <a:defRPr sz="1400" b="1">
-                <a:solidFill>
-                  <a:srgbClr val="1B5E6B"/>
-                </a:solidFill>
-              </a:defRPr>
-            </a:pPr>
-            <a:r>
-              <a:t>Methodological Limitations</a:t>
-            </a:r>
-          </a:p>
-        </p:txBody>
-      </p:sp>
-      <p:sp>
-        <p:nvSpPr>
-          <p:cNvPr id="9" name="TextBox 8"/>
-          <p:cNvSpPr txBox="1"/>
-          <p:nvPr/>
-        </p:nvSpPr>
-        <p:spPr>
-          <a:xfrm>
-            <a:off x="731520" y="3749039"/>
-            <a:ext cx="5029200" cy="1828800"/>
-          </a:xfrm>
-          <a:prstGeom prst="rect">
-            <a:avLst/>
-          </a:prstGeom>
-          <a:noFill/>
-        </p:spPr>
-        <p:txBody>
-          <a:bodyPr wrap="square">
-            <a:spAutoFit/>
-          </a:bodyPr>
-          <a:lstStyle/>
-          <a:p>
             <a:pPr>
               <a:spcAft>
                 <a:spcPts val="400"/>
               </a:spcAft>
-              <a:defRPr sz="1200">
+              <a:defRPr sz="1300">
                 <a:solidFill>
                   <a:srgbClr val="1F2937"/>
                 </a:solidFill>
               </a:defRPr>
             </a:pPr>
             <a:r>
-              <a:t>•  Small quarterly samples (N = 22–39 per ticker)</a:t>
+              <a:t>Part I: Context &amp; Data Pipeline (Tita Noviana — 40%)</a:t>
             </a:r>
           </a:p>
           <a:p>
@@ -5725,14 +6232,14 @@
               <a:spcAft>
                 <a:spcPts val="400"/>
               </a:spcAft>
-              <a:defRPr sz="1200">
+              <a:defRPr sz="1300">
                 <a:solidFill>
                   <a:srgbClr val="1F2937"/>
                 </a:solidFill>
               </a:defRPr>
             </a:pPr>
             <a:r>
-              <a:t>•  Capex is aggregated (AI + generic infra)</a:t>
+              <a:t>   1.  Industry Context &amp; Research Problem</a:t>
             </a:r>
           </a:p>
           <a:p>
@@ -5740,14 +6247,14 @@
               <a:spcAft>
                 <a:spcPts val="400"/>
               </a:spcAft>
-              <a:defRPr sz="1200">
+              <a:defRPr sz="1300">
                 <a:solidFill>
                   <a:srgbClr val="1F2937"/>
                 </a:solidFill>
               </a:defRPr>
             </a:pPr>
             <a:r>
-              <a:t>•  Segment recasts create discontinuities</a:t>
+              <a:t>   2.  Data Sources, Volume &amp; Quality Audit</a:t>
             </a:r>
           </a:p>
           <a:p>
@@ -5755,102 +6262,41 @@
               <a:spcAft>
                 <a:spcPts val="400"/>
               </a:spcAft>
-              <a:defRPr sz="1200">
+              <a:defRPr sz="1300">
                 <a:solidFill>
                   <a:srgbClr val="1F2937"/>
                 </a:solidFill>
               </a:defRPr>
             </a:pPr>
             <a:r>
-              <a:t>•  MAPE unstable near zero-growth quarters</a:t>
-            </a:r>
-          </a:p>
-        </p:txBody>
-      </p:sp>
-      <p:sp>
-        <p:nvSpPr>
-          <p:cNvPr id="10" name="TextBox 9"/>
-          <p:cNvSpPr txBox="1"/>
-          <p:nvPr/>
-        </p:nvSpPr>
-        <p:spPr>
-          <a:xfrm>
-            <a:off x="6400800" y="3291840"/>
-            <a:ext cx="4572000" cy="365760"/>
-          </a:xfrm>
-          <a:prstGeom prst="rect">
-            <a:avLst/>
-          </a:prstGeom>
-          <a:noFill/>
-        </p:spPr>
-        <p:txBody>
-          <a:bodyPr wrap="square">
-            <a:spAutoFit/>
-          </a:bodyPr>
-          <a:lstStyle/>
-          <a:p>
-            <a:pPr algn="l">
-              <a:defRPr sz="1400" b="1">
-                <a:solidFill>
-                  <a:srgbClr val="1B5E6B"/>
-                </a:solidFill>
-              </a:defRPr>
-            </a:pPr>
-            <a:r>
-              <a:t>Recommended Next Steps</a:t>
-            </a:r>
-          </a:p>
-        </p:txBody>
-      </p:sp>
-      <p:sp>
-        <p:nvSpPr>
-          <p:cNvPr id="11" name="TextBox 10"/>
-          <p:cNvSpPr txBox="1"/>
-          <p:nvPr/>
-        </p:nvSpPr>
-        <p:spPr>
-          <a:xfrm>
-            <a:off x="6400800" y="3749039"/>
-            <a:ext cx="5029200" cy="1828800"/>
-          </a:xfrm>
-          <a:prstGeom prst="rect">
-            <a:avLst/>
-          </a:prstGeom>
-          <a:noFill/>
-        </p:spPr>
-        <p:txBody>
-          <a:bodyPr wrap="square">
-            <a:spAutoFit/>
-          </a:bodyPr>
-          <a:lstStyle/>
+              <a:t>   3.  Methodology: Walk-Forward Time-Series Validation</a:t>
+            </a:r>
+          </a:p>
           <a:p>
             <a:pPr>
               <a:spcAft>
                 <a:spcPts val="400"/>
               </a:spcAft>
-              <a:defRPr sz="1200">
+              <a:defRPr sz="1300">
                 <a:solidFill>
                   <a:srgbClr val="1F2937"/>
                 </a:solidFill>
               </a:defRPr>
             </a:pPr>
-            <a:r>
-              <a:t>•  Incorporate GPU export tracking data</a:t>
-            </a:r>
           </a:p>
           <a:p>
             <a:pPr>
               <a:spcAft>
                 <a:spcPts val="400"/>
               </a:spcAft>
-              <a:defRPr sz="1200">
+              <a:defRPr sz="1300">
                 <a:solidFill>
                   <a:srgbClr val="1F2937"/>
                 </a:solidFill>
               </a:defRPr>
             </a:pPr>
             <a:r>
-              <a:t>•  Add datacenter power interconnect filings</a:t>
+              <a:t>Part II: Empirical Modeling &amp; Tuning (Suci Fransisca Sisilia R — 40%)</a:t>
             </a:r>
           </a:p>
           <a:p>
@@ -5858,14 +6304,14 @@
               <a:spcAft>
                 <a:spcPts val="400"/>
               </a:spcAft>
-              <a:defRPr sz="1200">
+              <a:defRPr sz="1300">
                 <a:solidFill>
                   <a:srgbClr val="1F2937"/>
                 </a:solidFill>
               </a:defRPr>
             </a:pPr>
             <a:r>
-              <a:t>•  NLP sentiment from earnings call transcripts</a:t>
+              <a:t>   4.  Candidate Models (AR(1), Ridge, Lasso, XGBoost vs. Naive)</a:t>
             </a:r>
           </a:p>
           <a:p>
@@ -5873,128 +6319,116 @@
               <a:spcAft>
                 <a:spcPts val="400"/>
               </a:spcAft>
-              <a:defRPr sz="1200">
+              <a:defRPr sz="1300">
                 <a:solidFill>
                   <a:srgbClr val="1F2937"/>
                 </a:solidFill>
               </a:defRPr>
             </a:pPr>
             <a:r>
-              <a:t>•  Test multi-year (4–8Q) transmission lags</a:t>
-            </a:r>
-          </a:p>
-        </p:txBody>
-      </p:sp>
-      <p:sp>
-        <p:nvSpPr>
-          <p:cNvPr id="12" name="Rectangle 11"/>
-          <p:cNvSpPr/>
-          <p:nvPr/>
-        </p:nvSpPr>
-        <p:spPr>
-          <a:xfrm>
-            <a:off x="0" y="5303520"/>
-            <a:ext cx="12191695" cy="1097280"/>
-          </a:xfrm>
-          <a:prstGeom prst="rect">
-            <a:avLst/>
-          </a:prstGeom>
-          <a:solidFill>
-            <a:srgbClr val="1B5E6B"/>
-          </a:solidFill>
-          <a:ln>
-            <a:noFill/>
-          </a:ln>
-        </p:spPr>
-        <p:style>
-          <a:lnRef idx="1">
-            <a:schemeClr val="accent1"/>
-          </a:lnRef>
-          <a:fillRef idx="3">
-            <a:schemeClr val="accent1"/>
-          </a:fillRef>
-          <a:effectRef idx="2">
-            <a:schemeClr val="accent1"/>
-          </a:effectRef>
-          <a:fontRef idx="minor">
-            <a:schemeClr val="lt1"/>
-          </a:fontRef>
-        </p:style>
-        <p:txBody>
-          <a:bodyPr rtlCol="0" anchor="ctr"/>
-          <a:lstStyle/>
-          <a:p>
-            <a:pPr algn="ctr"/>
-            <a:endParaRPr/>
-          </a:p>
-        </p:txBody>
-      </p:sp>
-      <p:sp>
-        <p:nvSpPr>
-          <p:cNvPr id="13" name="TextBox 12"/>
-          <p:cNvSpPr txBox="1"/>
-          <p:nvPr/>
-        </p:nvSpPr>
-        <p:spPr>
-          <a:xfrm>
-            <a:off x="731520" y="5394960"/>
-            <a:ext cx="10058400" cy="548640"/>
-          </a:xfrm>
-          <a:prstGeom prst="rect">
-            <a:avLst/>
-          </a:prstGeom>
-          <a:noFill/>
-        </p:spPr>
-        <p:txBody>
-          <a:bodyPr wrap="square">
-            <a:spAutoFit/>
-          </a:bodyPr>
-          <a:lstStyle/>
-          <a:p>
-            <a:pPr algn="ctr">
-              <a:defRPr sz="2600" b="1">
-                <a:solidFill>
-                  <a:srgbClr val="FFFFFF"/>
-                </a:solidFill>
-              </a:defRPr>
-            </a:pPr>
-            <a:r>
-              <a:t>Thank You — Questions &amp; Discussion</a:t>
-            </a:r>
-          </a:p>
-        </p:txBody>
-      </p:sp>
-      <p:sp>
-        <p:nvSpPr>
-          <p:cNvPr id="14" name="TextBox 13"/>
-          <p:cNvSpPr txBox="1"/>
-          <p:nvPr/>
-        </p:nvSpPr>
-        <p:spPr>
-          <a:xfrm>
-            <a:off x="731520" y="5897880"/>
-            <a:ext cx="10058400" cy="365760"/>
-          </a:xfrm>
-          <a:prstGeom prst="rect">
-            <a:avLst/>
-          </a:prstGeom>
-          <a:noFill/>
-        </p:spPr>
-        <p:txBody>
-          <a:bodyPr wrap="square">
-            <a:spAutoFit/>
-          </a:bodyPr>
-          <a:lstStyle/>
-          <a:p>
-            <a:pPr algn="ctr">
-              <a:defRPr sz="1300" b="0">
-                <a:solidFill>
-                  <a:srgbClr val="C5A55A"/>
-                </a:solidFill>
-              </a:defRPr>
-            </a:pPr>
-            <a:r>
-              <a:t>Tita Noviana (40%)  •  Suci Fransisca Sisilia R (40%)  •  Nadira Dika Kaivalya (20%)</a:t>
+              <a:t>   5.  Master Cross-Model Comparison Table</a:t>
+            </a:r>
+          </a:p>
+          <a:p>
+            <a:pPr>
+              <a:spcAft>
+                <a:spcPts val="400"/>
+              </a:spcAft>
+              <a:defRPr sz="1300">
+                <a:solidFill>
+                  <a:srgbClr val="1F2937"/>
+                </a:solidFill>
+              </a:defRPr>
+            </a:pPr>
+            <a:r>
+              <a:t>   6.  Hyperparameter Tuning: Default vs. Tuned Audit</a:t>
+            </a:r>
+          </a:p>
+          <a:p>
+            <a:pPr>
+              <a:spcAft>
+                <a:spcPts val="400"/>
+              </a:spcAft>
+              <a:defRPr sz="1300">
+                <a:solidFill>
+                  <a:srgbClr val="1F2937"/>
+                </a:solidFill>
+              </a:defRPr>
+            </a:pPr>
+            <a:r>
+              <a:t>   7.  Model Interpretation: Why Capex Lags = 0.000</a:t>
+            </a:r>
+          </a:p>
+          <a:p>
+            <a:pPr>
+              <a:spcAft>
+                <a:spcPts val="400"/>
+              </a:spcAft>
+              <a:defRPr sz="1300">
+                <a:solidFill>
+                  <a:srgbClr val="1F2937"/>
+                </a:solidFill>
+              </a:defRPr>
+            </a:pPr>
+          </a:p>
+          <a:p>
+            <a:pPr>
+              <a:spcAft>
+                <a:spcPts val="400"/>
+              </a:spcAft>
+              <a:defRPr sz="1300">
+                <a:solidFill>
+                  <a:srgbClr val="1F2937"/>
+                </a:solidFill>
+              </a:defRPr>
+            </a:pPr>
+            <a:r>
+              <a:t>Part III: Regime Shifts &amp; Executive Strategy (Nadira Dika Kaivalya — 20%)</a:t>
+            </a:r>
+          </a:p>
+          <a:p>
+            <a:pPr>
+              <a:spcAft>
+                <a:spcPts val="400"/>
+              </a:spcAft>
+              <a:defRPr sz="1300">
+                <a:solidFill>
+                  <a:srgbClr val="1F2937"/>
+                </a:solidFill>
+              </a:defRPr>
+            </a:pPr>
+            <a:r>
+              <a:t>   8.  Regime Shift Test: Pre-2023 vs. Post-2023 AI Boom</a:t>
+            </a:r>
+          </a:p>
+          <a:p>
+            <a:pPr>
+              <a:spcAft>
+                <a:spcPts val="400"/>
+              </a:spcAft>
+              <a:defRPr sz="1300">
+                <a:solidFill>
+                  <a:srgbClr val="1F2937"/>
+                </a:solidFill>
+              </a:defRPr>
+            </a:pPr>
+            <a:r>
+              <a:t>   9.  Strategic Recommendations for C-Level Executives</a:t>
+            </a:r>
+          </a:p>
+          <a:p>
+            <a:pPr>
+              <a:spcAft>
+                <a:spcPts val="400"/>
+              </a:spcAft>
+              <a:defRPr sz="1300">
+                <a:solidFill>
+                  <a:srgbClr val="1F2937"/>
+                </a:solidFill>
+              </a:defRPr>
+            </a:pPr>
+            <a:r>
+              <a:t>   10. 2030 Strategic Scenarios, Technical &amp; Business Limitations</a:t>
             </a:r>
           </a:p>
         </p:txBody>
@@ -6007,8 +6441,8 @@
 </p:sld>
 </file>
 
-<file path=ppt/slides/slide2.xml><?xml version="1.0" encoding="utf-8"?>
-<p:sld xmlns:a="http://schemas.openxmlformats.org/drawingml/2006/main" xmlns:r="http://schemas.openxmlformats.org/officeDocument/2006/relationships" xmlns:p="http://schemas.openxmlformats.org/presentationml/2006/main">
+<file path=ppt/slides/slide3.xml><?xml version="1.0" encoding="utf-8"?>
+<p:sld xmlns:a="http://schemas.openxmlformats.org/drawingml/2006/main" xmlns:p="http://schemas.openxmlformats.org/presentationml/2006/main" xmlns:r="http://schemas.openxmlformats.org/officeDocument/2006/relationships">
   <p:cSld>
     <p:bg>
       <p:bgPr>
@@ -6024,17 +6458,10 @@
         <p:cNvGrpSpPr/>
         <p:nvPr/>
       </p:nvGrpSpPr>
-      <p:grpSpPr>
-        <a:xfrm>
-          <a:off x="0" y="0"/>
-          <a:ext cx="0" cy="0"/>
-          <a:chOff x="0" y="0"/>
-          <a:chExt cx="0" cy="0"/>
-        </a:xfrm>
-      </p:grpSpPr>
+      <p:grpSpPr/>
       <p:pic>
         <p:nvPicPr>
-          <p:cNvPr id="2" name="Picture 1" descr="images.png"/>
+          <p:cNvPr id="2" name="Picture 1" descr="logo.png"/>
           <p:cNvPicPr>
             <a:picLocks noChangeAspect="1"/>
           </p:cNvPicPr>
@@ -6096,7 +6523,6 @@
           <a:lstStyle/>
           <a:p>
             <a:pPr algn="ctr"/>
-            <a:endParaRPr/>
           </a:p>
         </p:txBody>
       </p:sp>
@@ -6109,7 +6535,7 @@
         <p:spPr>
           <a:xfrm>
             <a:off x="731520" y="274320"/>
-            <a:ext cx="7315200" cy="548640"/>
+            <a:ext cx="9144000" cy="548640"/>
           </a:xfrm>
           <a:prstGeom prst="rect">
             <a:avLst/>
@@ -6130,7 +6556,7 @@
               </a:defRPr>
             </a:pPr>
             <a:r>
-              <a:t>Presentation Outline</a:t>
+              <a:t>Industry Context &amp; Research Problem</a:t>
             </a:r>
           </a:p>
         </p:txBody>
@@ -6175,7 +6601,6 @@
           <a:lstStyle/>
           <a:p>
             <a:pPr algn="ctr"/>
-            <a:endParaRPr/>
           </a:p>
         </p:txBody>
       </p:sp>
@@ -6187,8 +6612,8 @@
         </p:nvSpPr>
         <p:spPr>
           <a:xfrm>
-            <a:off x="914400" y="1188720"/>
-            <a:ext cx="10058400" cy="3811300"/>
+            <a:off x="731520" y="1188720"/>
+            <a:ext cx="5486400" cy="365760"/>
           </a:xfrm>
           <a:prstGeom prst="rect">
             <a:avLst/>
@@ -6201,86 +6626,53 @@
           </a:bodyPr>
           <a:lstStyle/>
           <a:p>
+            <a:pPr algn="l">
+              <a:defRPr sz="1800" b="1">
+                <a:solidFill>
+                  <a:srgbClr val="1B5E6B"/>
+                </a:solidFill>
+              </a:defRPr>
+            </a:pPr>
+            <a:r>
+              <a:t>The Capital Allocation Dilemma</a:t>
+            </a:r>
+          </a:p>
+        </p:txBody>
+      </p:sp>
+      <p:sp>
+        <p:nvSpPr>
+          <p:cNvPr id="7" name="TextBox 6"/>
+          <p:cNvSpPr txBox="1"/>
+          <p:nvPr/>
+        </p:nvSpPr>
+        <p:spPr>
+          <a:xfrm>
+            <a:off x="731520" y="1737360"/>
+            <a:ext cx="10058400" cy="4114800"/>
+          </a:xfrm>
+          <a:prstGeom prst="rect">
+            <a:avLst/>
+          </a:prstGeom>
+          <a:noFill/>
+        </p:spPr>
+        <p:txBody>
+          <a:bodyPr wrap="square">
+            <a:spAutoFit/>
+          </a:bodyPr>
+          <a:lstStyle/>
+          <a:p>
             <a:pPr>
               <a:spcAft>
                 <a:spcPts val="400"/>
               </a:spcAft>
-              <a:defRPr sz="1300">
+              <a:defRPr sz="1400">
                 <a:solidFill>
                   <a:srgbClr val="1F2937"/>
                 </a:solidFill>
               </a:defRPr>
             </a:pPr>
             <a:r>
-              <a:rPr dirty="0"/>
-              <a:t>Part I: Context &amp; Data Pipeline </a:t>
-            </a:r>
-            <a:endParaRPr lang="en-US" dirty="0" smtClean="0"/>
-          </a:p>
-          <a:p>
-            <a:pPr marL="342900" indent="-342900">
-              <a:spcAft>
-                <a:spcPts val="400"/>
-              </a:spcAft>
-              <a:buFont typeface="+mj-lt"/>
-              <a:buAutoNum type="arabicPeriod"/>
-              <a:defRPr sz="1300">
-                <a:solidFill>
-                  <a:srgbClr val="1F2937"/>
-                </a:solidFill>
-              </a:defRPr>
-            </a:pPr>
-            <a:r>
-              <a:rPr dirty="0" smtClean="0"/>
-              <a:t>Industry </a:t>
-            </a:r>
-            <a:r>
-              <a:rPr dirty="0"/>
-              <a:t>Context &amp; Research Problem</a:t>
-            </a:r>
-          </a:p>
-          <a:p>
-            <a:pPr marL="342900" indent="-342900">
-              <a:spcAft>
-                <a:spcPts val="400"/>
-              </a:spcAft>
-              <a:buFont typeface="+mj-lt"/>
-              <a:buAutoNum type="arabicPeriod"/>
-              <a:defRPr sz="1300">
-                <a:solidFill>
-                  <a:srgbClr val="1F2937"/>
-                </a:solidFill>
-              </a:defRPr>
-            </a:pPr>
-            <a:r>
-              <a:rPr dirty="0" smtClean="0"/>
-              <a:t>Data </a:t>
-            </a:r>
-            <a:r>
-              <a:rPr dirty="0"/>
-              <a:t>Sources, Volume &amp; Quality Audit</a:t>
-            </a:r>
-          </a:p>
-          <a:p>
-            <a:pPr marL="342900" indent="-342900">
-              <a:spcAft>
-                <a:spcPts val="400"/>
-              </a:spcAft>
-              <a:buFont typeface="+mj-lt"/>
-              <a:buAutoNum type="arabicPeriod"/>
-              <a:defRPr sz="1300">
-                <a:solidFill>
-                  <a:srgbClr val="1F2937"/>
-                </a:solidFill>
-              </a:defRPr>
-            </a:pPr>
-            <a:r>
-              <a:rPr dirty="0" smtClean="0"/>
-              <a:t>Methodology</a:t>
-            </a:r>
-            <a:r>
-              <a:rPr dirty="0"/>
-              <a:t>: Walk-Forward Time-Series Validation</a:t>
+              <a:t>•  Amazon, Google, and Microsoft each spend $30B–$50B+ annually on AI datacenter infrastructure</a:t>
             </a:r>
           </a:p>
           <a:p>
@@ -6288,138 +6680,29 @@
               <a:spcAft>
                 <a:spcPts val="400"/>
               </a:spcAft>
-              <a:defRPr sz="1300">
+              <a:defRPr sz="1400">
                 <a:solidFill>
                   <a:srgbClr val="1F2937"/>
                 </a:solidFill>
               </a:defRPr>
             </a:pPr>
-            <a:endParaRPr dirty="0"/>
+            <a:r>
+              <a:t>•  Implicit assumption: aggressive capex → faster cloud revenue growth after 1–4 quarter lag</a:t>
+            </a:r>
           </a:p>
           <a:p>
             <a:pPr>
               <a:spcAft>
                 <a:spcPts val="400"/>
               </a:spcAft>
-              <a:defRPr sz="1300">
+              <a:defRPr sz="1400">
                 <a:solidFill>
                   <a:srgbClr val="1F2937"/>
                 </a:solidFill>
               </a:defRPr>
             </a:pPr>
             <a:r>
-              <a:rPr dirty="0"/>
-              <a:t>Part II: Empirical Modeling &amp; </a:t>
-            </a:r>
-            <a:r>
-              <a:rPr dirty="0" smtClean="0"/>
-              <a:t>Tuning</a:t>
-            </a:r>
-            <a:endParaRPr dirty="0"/>
-          </a:p>
-          <a:p>
-            <a:pPr marL="342900" indent="-342900">
-              <a:spcAft>
-                <a:spcPts val="400"/>
-              </a:spcAft>
-              <a:buFont typeface="+mj-lt"/>
-              <a:buAutoNum type="arabicPeriod" startAt="4"/>
-              <a:defRPr sz="1300">
-                <a:solidFill>
-                  <a:srgbClr val="1F2937"/>
-                </a:solidFill>
-              </a:defRPr>
-            </a:pPr>
-            <a:r>
-              <a:rPr dirty="0" smtClean="0"/>
-              <a:t>Candidate </a:t>
-            </a:r>
-            <a:r>
-              <a:rPr dirty="0"/>
-              <a:t>Models (AR(1), Ridge, Lasso, </a:t>
-            </a:r>
-            <a:r>
-              <a:rPr dirty="0" err="1"/>
-              <a:t>XGBoost</a:t>
-            </a:r>
-            <a:r>
-              <a:rPr dirty="0"/>
-              <a:t> vs. Naive)</a:t>
-            </a:r>
-          </a:p>
-          <a:p>
-            <a:pPr marL="342900" indent="-342900">
-              <a:spcAft>
-                <a:spcPts val="400"/>
-              </a:spcAft>
-              <a:buFont typeface="+mj-lt"/>
-              <a:buAutoNum type="arabicPeriod" startAt="4"/>
-              <a:defRPr sz="1300">
-                <a:solidFill>
-                  <a:srgbClr val="1F2937"/>
-                </a:solidFill>
-              </a:defRPr>
-            </a:pPr>
-            <a:r>
-              <a:rPr dirty="0" smtClean="0"/>
-              <a:t>Master </a:t>
-            </a:r>
-            <a:r>
-              <a:rPr dirty="0"/>
-              <a:t>Cross-Model Comparison Table</a:t>
-            </a:r>
-          </a:p>
-          <a:p>
-            <a:pPr marL="342900" indent="-342900">
-              <a:spcAft>
-                <a:spcPts val="400"/>
-              </a:spcAft>
-              <a:buFont typeface="+mj-lt"/>
-              <a:buAutoNum type="arabicPeriod" startAt="4"/>
-              <a:defRPr sz="1300">
-                <a:solidFill>
-                  <a:srgbClr val="1F2937"/>
-                </a:solidFill>
-              </a:defRPr>
-            </a:pPr>
-            <a:r>
-              <a:rPr dirty="0" err="1" smtClean="0"/>
-              <a:t>Hyperparameter</a:t>
-            </a:r>
-            <a:r>
-              <a:rPr dirty="0" smtClean="0"/>
-              <a:t> </a:t>
-            </a:r>
-            <a:r>
-              <a:rPr dirty="0"/>
-              <a:t>Tuning: Default vs. Tuned </a:t>
-            </a:r>
-            <a:r>
-              <a:rPr dirty="0" smtClean="0"/>
-              <a:t>Audit</a:t>
-            </a:r>
-            <a:endParaRPr lang="en-US" dirty="0" smtClean="0"/>
-          </a:p>
-          <a:p>
-            <a:pPr marL="342900" indent="-342900">
-              <a:spcAft>
-                <a:spcPts val="400"/>
-              </a:spcAft>
-              <a:buFont typeface="+mj-lt"/>
-              <a:buAutoNum type="arabicPeriod" startAt="4"/>
-              <a:defRPr sz="1300">
-                <a:solidFill>
-                  <a:srgbClr val="1F2937"/>
-                </a:solidFill>
-              </a:defRPr>
-            </a:pPr>
-            <a:r>
-              <a:rPr dirty="0" smtClean="0"/>
-              <a:t>Model </a:t>
-            </a:r>
-            <a:r>
-              <a:rPr dirty="0"/>
-              <a:t>Interpretation: Why Capex Lags = 0.000</a:t>
+              <a:t>•  CFOs need to know: Is this assumption empirically supported for short-term revenue guidance?</a:t>
             </a:r>
           </a:p>
           <a:p>
@@ -6427,99 +6710,141 @@
               <a:spcAft>
                 <a:spcPts val="400"/>
               </a:spcAft>
-              <a:defRPr sz="1300">
+              <a:defRPr sz="1400">
                 <a:solidFill>
                   <a:srgbClr val="1F2937"/>
                 </a:solidFill>
               </a:defRPr>
             </a:pPr>
-            <a:endParaRPr dirty="0"/>
           </a:p>
           <a:p>
             <a:pPr>
               <a:spcAft>
                 <a:spcPts val="400"/>
               </a:spcAft>
-              <a:defRPr sz="1300">
+              <a:defRPr sz="1400">
                 <a:solidFill>
                   <a:srgbClr val="1F2937"/>
                 </a:solidFill>
               </a:defRPr>
             </a:pPr>
             <a:r>
-              <a:rPr dirty="0"/>
-              <a:t>Part III: Regime Shifts &amp; Executive </a:t>
-            </a:r>
-            <a:r>
-              <a:rPr dirty="0" smtClean="0"/>
-              <a:t>Strategy</a:t>
-            </a:r>
-            <a:endParaRPr lang="en-US" dirty="0" smtClean="0"/>
-          </a:p>
-          <a:p>
-            <a:pPr marL="342900" indent="-342900">
+              <a:t>Three Testable Hypotheses:</a:t>
+            </a:r>
+          </a:p>
+          <a:p>
+            <a:pPr>
               <a:spcAft>
                 <a:spcPts val="400"/>
               </a:spcAft>
-              <a:buFont typeface="+mj-lt"/>
-              <a:buAutoNum type="arabicPeriod" startAt="8"/>
-              <a:defRPr sz="1300">
+              <a:defRPr sz="1400">
                 <a:solidFill>
                   <a:srgbClr val="1F2937"/>
                 </a:solidFill>
               </a:defRPr>
             </a:pPr>
             <a:r>
-              <a:rPr dirty="0" smtClean="0"/>
-              <a:t>Regime </a:t>
-            </a:r>
-            <a:r>
-              <a:rPr dirty="0"/>
-              <a:t>Shift Test: Pre-2023 vs. Post-2023 AI Boom</a:t>
-            </a:r>
-          </a:p>
-          <a:p>
-            <a:pPr marL="342900" indent="-342900">
+              <a:t>   H₁:  Capex growth (lag 1–4Q) predicts cloud revenue YoY growth</a:t>
+            </a:r>
+          </a:p>
+          <a:p>
+            <a:pPr>
               <a:spcAft>
                 <a:spcPts val="400"/>
               </a:spcAft>
-              <a:buFont typeface="+mj-lt"/>
-              <a:buAutoNum type="arabicPeriod" startAt="8"/>
-              <a:defRPr sz="1300">
+              <a:defRPr sz="1400">
                 <a:solidFill>
                   <a:srgbClr val="1F2937"/>
                 </a:solidFill>
               </a:defRPr>
             </a:pPr>
             <a:r>
-              <a:rPr dirty="0" smtClean="0"/>
-              <a:t>Strategic </a:t>
-            </a:r>
-            <a:r>
-              <a:rPr dirty="0"/>
-              <a:t>Recommendations for C-Level Executives</a:t>
-            </a:r>
-          </a:p>
-          <a:p>
-            <a:pPr marL="342900" indent="-342900">
+              <a:t>   H₂:  ML models (Ridge, Lasso, XGBoost) beat a simple Naive baseline</a:t>
+            </a:r>
+          </a:p>
+          <a:p>
+            <a:pPr>
               <a:spcAft>
                 <a:spcPts val="400"/>
               </a:spcAft>
-              <a:buFont typeface="+mj-lt"/>
-              <a:buAutoNum type="arabicPeriod" startAt="8"/>
-              <a:defRPr sz="1300">
+              <a:defRPr sz="1400">
                 <a:solidFill>
                   <a:srgbClr val="1F2937"/>
                 </a:solidFill>
               </a:defRPr>
             </a:pPr>
             <a:r>
-              <a:rPr dirty="0" smtClean="0"/>
-              <a:t>2030 </a:t>
-            </a:r>
-            <a:r>
-              <a:rPr dirty="0"/>
-              <a:t>Scenarios, Limitations &amp; Next Steps</a:t>
+              <a:t>   H₃:  The capex–cloud relationship shifted in the 2023+ Generative AI era</a:t>
+            </a:r>
+          </a:p>
+        </p:txBody>
+      </p:sp>
+      <p:sp>
+        <p:nvSpPr>
+          <p:cNvPr id="8" name="Rounded Rectangle 7"/>
+          <p:cNvSpPr/>
+          <p:nvPr/>
+        </p:nvSpPr>
+        <p:spPr>
+          <a:xfrm>
+            <a:off x="7772400" y="1188720"/>
+            <a:ext cx="3840480" cy="1280160"/>
+          </a:xfrm>
+          <a:prstGeom prst="roundRect">
+            <a:avLst/>
+          </a:prstGeom>
+          <a:solidFill>
+            <a:srgbClr val="F0FDFA"/>
+          </a:solidFill>
+          <a:ln w="19050">
+            <a:solidFill>
+              <a:srgbClr val="1B5E6B"/>
+            </a:solidFill>
+          </a:ln>
+        </p:spPr>
+        <p:style>
+          <a:lnRef idx="1">
+            <a:schemeClr val="accent1"/>
+          </a:lnRef>
+          <a:fillRef idx="3">
+            <a:schemeClr val="accent1"/>
+          </a:fillRef>
+          <a:effectRef idx="2">
+            <a:schemeClr val="accent1"/>
+          </a:effectRef>
+          <a:fontRef idx="minor">
+            <a:schemeClr val="lt1"/>
+          </a:fontRef>
+        </p:style>
+        <p:txBody>
+          <a:bodyPr rtlCol="0" anchor="ctr" wrap="square"/>
+          <a:lstStyle/>
+          <a:p>
+            <a:pPr algn="ctr">
+              <a:defRPr sz="1100" b="1">
+                <a:solidFill>
+                  <a:srgbClr val="1B5E6B"/>
+                </a:solidFill>
+              </a:defRPr>
+            </a:pPr>
+            <a:r>
+              <a:t>Primary Stakeholder</a:t>
+            </a:r>
+          </a:p>
+          <a:p>
+            <a:pPr>
+              <a:defRPr sz="1100">
+                <a:solidFill>
+                  <a:srgbClr val="1F2937"/>
+                </a:solidFill>
+              </a:defRPr>
+            </a:pPr>
+            <a:r>
+              <a:t>Chief Financial Officer (CFO)</a:t>
+            </a:r>
+            <a:br/>
+            <a:r>
+              <a:t>&amp; Capital Allocation Committee</a:t>
             </a:r>
           </a:p>
         </p:txBody>
@@ -6532,8 +6857,8 @@
 </p:sld>
 </file>
 
-<file path=ppt/slides/slide3.xml><?xml version="1.0" encoding="utf-8"?>
-<p:sld xmlns:a="http://schemas.openxmlformats.org/drawingml/2006/main" xmlns:r="http://schemas.openxmlformats.org/officeDocument/2006/relationships" xmlns:p="http://schemas.openxmlformats.org/presentationml/2006/main">
+<file path=ppt/slides/slide4.xml><?xml version="1.0" encoding="utf-8"?>
+<p:sld xmlns:a="http://schemas.openxmlformats.org/drawingml/2006/main" xmlns:p="http://schemas.openxmlformats.org/presentationml/2006/main" xmlns:r="http://schemas.openxmlformats.org/officeDocument/2006/relationships">
   <p:cSld>
     <p:bg>
       <p:bgPr>
@@ -6549,17 +6874,10 @@
         <p:cNvGrpSpPr/>
         <p:nvPr/>
       </p:nvGrpSpPr>
-      <p:grpSpPr>
-        <a:xfrm>
-          <a:off x="0" y="0"/>
-          <a:ext cx="0" cy="0"/>
-          <a:chOff x="0" y="0"/>
-          <a:chExt cx="0" cy="0"/>
-        </a:xfrm>
-      </p:grpSpPr>
+      <p:grpSpPr/>
       <p:pic>
         <p:nvPicPr>
-          <p:cNvPr id="2" name="Picture 1" descr="images.png"/>
+          <p:cNvPr id="2" name="Picture 1" descr="logo.png"/>
           <p:cNvPicPr>
             <a:picLocks noChangeAspect="1"/>
           </p:cNvPicPr>
@@ -6621,7 +6939,6 @@
           <a:lstStyle/>
           <a:p>
             <a:pPr algn="ctr"/>
-            <a:endParaRPr/>
           </a:p>
         </p:txBody>
       </p:sp>
@@ -6655,7 +6972,7 @@
               </a:defRPr>
             </a:pPr>
             <a:r>
-              <a:t>Industry Context &amp; Research Problem</a:t>
+              <a:t>Data Sources, Volume &amp; Quality Audit</a:t>
             </a:r>
           </a:p>
         </p:txBody>
@@ -6700,7 +7017,6 @@
           <a:lstStyle/>
           <a:p>
             <a:pPr algn="ctr"/>
-            <a:endParaRPr/>
           </a:p>
         </p:txBody>
       </p:sp>
@@ -6713,7 +7029,7 @@
         <p:spPr>
           <a:xfrm>
             <a:off x="731520" y="1188720"/>
-            <a:ext cx="5486400" cy="365760"/>
+            <a:ext cx="10058400" cy="1371600"/>
           </a:xfrm>
           <a:prstGeom prst="rect">
             <a:avLst/>
@@ -6726,29 +7042,493 @@
           </a:bodyPr>
           <a:lstStyle/>
           <a:p>
-            <a:pPr algn="l">
-              <a:defRPr sz="1800" b="1">
-                <a:solidFill>
-                  <a:srgbClr val="1B5E6B"/>
-                </a:solidFill>
-              </a:defRPr>
-            </a:pPr>
-            <a:r>
-              <a:t>The Capital Allocation Dilemma</a:t>
-            </a:r>
-          </a:p>
-        </p:txBody>
-      </p:sp>
-      <p:sp>
-        <p:nvSpPr>
-          <p:cNvPr id="7" name="TextBox 6"/>
+            <a:pPr>
+              <a:spcAft>
+                <a:spcPts val="400"/>
+              </a:spcAft>
+              <a:defRPr sz="1300">
+                <a:solidFill>
+                  <a:srgbClr val="1F2937"/>
+                </a:solidFill>
+              </a:defRPr>
+            </a:pPr>
+            <a:r>
+              <a:t>•  SEC EDGAR XBRL (companyfacts): Consolidated quarterly financials (Revenue, Capex, OCF, Debt)</a:t>
+            </a:r>
+          </a:p>
+          <a:p>
+            <a:pPr>
+              <a:spcAft>
+                <a:spcPts val="400"/>
+              </a:spcAft>
+              <a:defRPr sz="1300">
+                <a:solidFill>
+                  <a:srgbClr val="1F2937"/>
+                </a:solidFill>
+              </a:defRPr>
+            </a:pPr>
+            <a:r>
+              <a:t>•  SEC Form 8-K Exhibit 99.1: 121 manually curated &amp; cross-verified cloud segment revenue records</a:t>
+            </a:r>
+          </a:p>
+          <a:p>
+            <a:pPr>
+              <a:spcAft>
+                <a:spcPts val="400"/>
+              </a:spcAft>
+              <a:defRPr sz="1300">
+                <a:solidFill>
+                  <a:srgbClr val="1F2937"/>
+                </a:solidFill>
+              </a:defRPr>
+            </a:pPr>
+            <a:r>
+              <a:t>•  FRED (St. Louis Fed): Federal Funds Rate quarterly macro series</a:t>
+            </a:r>
+          </a:p>
+        </p:txBody>
+      </p:sp>
+      <p:graphicFrame>
+        <p:nvGraphicFramePr>
+          <p:cNvPr id="7" name="Table 6"/>
+          <p:cNvGraphicFramePr>
+            <a:graphicFrameLocks noGrp="1"/>
+          </p:cNvGraphicFramePr>
+          <p:nvPr/>
+        </p:nvGraphicFramePr>
+        <p:xfrm>
+          <a:off x="731520" y="2743200"/>
+          <a:ext cx="6858000" cy="2011680"/>
+        </p:xfrm>
+        <a:graphic>
+          <a:graphicData uri="http://schemas.openxmlformats.org/drawingml/2006/table">
+            <a:tbl>
+              <a:tblPr firstRow="1" bandRow="1">
+                <a:tableStyleId>{5C22544A-7EE6-4342-B048-85BDC9FD1C3A}</a:tableStyleId>
+              </a:tblPr>
+              <a:tblGrid>
+                <a:gridCol w="1714500"/>
+                <a:gridCol w="1714500"/>
+                <a:gridCol w="1714500"/>
+                <a:gridCol w="1714500"/>
+              </a:tblGrid>
+              <a:tr h="402336">
+                <a:tc>
+                  <a:txBody>
+                    <a:bodyPr/>
+                    <a:lstStyle/>
+                    <a:p>
+                      <a:pPr algn="ctr">
+                        <a:defRPr b="1" sz="1100">
+                          <a:solidFill>
+                            <a:srgbClr val="FFFFFF"/>
+                          </a:solidFill>
+                        </a:defRPr>
+                      </a:pPr>
+                      <a:r>
+                        <a:t>Hyperscaler</a:t>
+                      </a:r>
+                    </a:p>
+                  </a:txBody>
+                  <a:tcPr>
+                    <a:solidFill>
+                      <a:srgbClr val="1B5E6B"/>
+                    </a:solidFill>
+                  </a:tcPr>
+                </a:tc>
+                <a:tc>
+                  <a:txBody>
+                    <a:bodyPr/>
+                    <a:lstStyle/>
+                    <a:p>
+                      <a:pPr algn="ctr">
+                        <a:defRPr b="1" sz="1100">
+                          <a:solidFill>
+                            <a:srgbClr val="FFFFFF"/>
+                          </a:solidFill>
+                        </a:defRPr>
+                      </a:pPr>
+                      <a:r>
+                        <a:t>Cloud Segment</a:t>
+                      </a:r>
+                    </a:p>
+                  </a:txBody>
+                  <a:tcPr>
+                    <a:solidFill>
+                      <a:srgbClr val="1B5E6B"/>
+                    </a:solidFill>
+                  </a:tcPr>
+                </a:tc>
+                <a:tc>
+                  <a:txBody>
+                    <a:bodyPr/>
+                    <a:lstStyle/>
+                    <a:p>
+                      <a:pPr algn="ctr">
+                        <a:defRPr b="1" sz="1100">
+                          <a:solidFill>
+                            <a:srgbClr val="FFFFFF"/>
+                          </a:solidFill>
+                        </a:defRPr>
+                      </a:pPr>
+                      <a:r>
+                        <a:t>Quarters</a:t>
+                      </a:r>
+                    </a:p>
+                  </a:txBody>
+                  <a:tcPr>
+                    <a:solidFill>
+                      <a:srgbClr val="1B5E6B"/>
+                    </a:solidFill>
+                  </a:tcPr>
+                </a:tc>
+                <a:tc>
+                  <a:txBody>
+                    <a:bodyPr/>
+                    <a:lstStyle/>
+                    <a:p>
+                      <a:pPr algn="ctr">
+                        <a:defRPr b="1" sz="1100">
+                          <a:solidFill>
+                            <a:srgbClr val="FFFFFF"/>
+                          </a:solidFill>
+                        </a:defRPr>
+                      </a:pPr>
+                      <a:r>
+                        <a:t>Period</a:t>
+                      </a:r>
+                    </a:p>
+                  </a:txBody>
+                  <a:tcPr>
+                    <a:solidFill>
+                      <a:srgbClr val="1B5E6B"/>
+                    </a:solidFill>
+                  </a:tcPr>
+                </a:tc>
+              </a:tr>
+              <a:tr h="402336">
+                <a:tc>
+                  <a:txBody>
+                    <a:bodyPr/>
+                    <a:lstStyle/>
+                    <a:p>
+                      <a:pPr algn="ctr">
+                        <a:defRPr sz="1000" b="0">
+                          <a:solidFill>
+                            <a:srgbClr val="1F2937"/>
+                          </a:solidFill>
+                        </a:defRPr>
+                      </a:pPr>
+                      <a:r>
+                        <a:t>Amazon (AMZN)</a:t>
+                      </a:r>
+                    </a:p>
+                  </a:txBody>
+                  <a:tcPr/>
+                </a:tc>
+                <a:tc>
+                  <a:txBody>
+                    <a:bodyPr/>
+                    <a:lstStyle/>
+                    <a:p>
+                      <a:pPr algn="ctr">
+                        <a:defRPr sz="1000" b="0">
+                          <a:solidFill>
+                            <a:srgbClr val="1F2937"/>
+                          </a:solidFill>
+                        </a:defRPr>
+                      </a:pPr>
+                      <a:r>
+                        <a:t>AWS</a:t>
+                      </a:r>
+                    </a:p>
+                  </a:txBody>
+                  <a:tcPr/>
+                </a:tc>
+                <a:tc>
+                  <a:txBody>
+                    <a:bodyPr/>
+                    <a:lstStyle/>
+                    <a:p>
+                      <a:pPr algn="ctr">
+                        <a:defRPr sz="1000" b="0">
+                          <a:solidFill>
+                            <a:srgbClr val="1F2937"/>
+                          </a:solidFill>
+                        </a:defRPr>
+                      </a:pPr>
+                      <a:r>
+                        <a:t>50</a:t>
+                      </a:r>
+                    </a:p>
+                  </a:txBody>
+                  <a:tcPr/>
+                </a:tc>
+                <a:tc>
+                  <a:txBody>
+                    <a:bodyPr/>
+                    <a:lstStyle/>
+                    <a:p>
+                      <a:pPr algn="ctr">
+                        <a:defRPr sz="1000" b="0">
+                          <a:solidFill>
+                            <a:srgbClr val="1F2937"/>
+                          </a:solidFill>
+                        </a:defRPr>
+                      </a:pPr>
+                      <a:r>
+                        <a:t>2014-Q1 → 2026-Q2</a:t>
+                      </a:r>
+                    </a:p>
+                  </a:txBody>
+                  <a:tcPr/>
+                </a:tc>
+              </a:tr>
+              <a:tr h="402336">
+                <a:tc>
+                  <a:txBody>
+                    <a:bodyPr/>
+                    <a:lstStyle/>
+                    <a:p>
+                      <a:pPr algn="ctr">
+                        <a:defRPr sz="1000" b="0">
+                          <a:solidFill>
+                            <a:srgbClr val="1F2937"/>
+                          </a:solidFill>
+                        </a:defRPr>
+                      </a:pPr>
+                      <a:r>
+                        <a:t>Microsoft (MSFT)</a:t>
+                      </a:r>
+                    </a:p>
+                  </a:txBody>
+                  <a:tcPr/>
+                </a:tc>
+                <a:tc>
+                  <a:txBody>
+                    <a:bodyPr/>
+                    <a:lstStyle/>
+                    <a:p>
+                      <a:pPr algn="ctr">
+                        <a:defRPr sz="1000" b="0">
+                          <a:solidFill>
+                            <a:srgbClr val="1F2937"/>
+                          </a:solidFill>
+                        </a:defRPr>
+                      </a:pPr>
+                      <a:r>
+                        <a:t>Intelligent Cloud</a:t>
+                      </a:r>
+                    </a:p>
+                  </a:txBody>
+                  <a:tcPr/>
+                </a:tc>
+                <a:tc>
+                  <a:txBody>
+                    <a:bodyPr/>
+                    <a:lstStyle/>
+                    <a:p>
+                      <a:pPr algn="ctr">
+                        <a:defRPr sz="1000" b="0">
+                          <a:solidFill>
+                            <a:srgbClr val="1F2937"/>
+                          </a:solidFill>
+                        </a:defRPr>
+                      </a:pPr>
+                      <a:r>
+                        <a:t>44</a:t>
+                      </a:r>
+                    </a:p>
+                  </a:txBody>
+                  <a:tcPr/>
+                </a:tc>
+                <a:tc>
+                  <a:txBody>
+                    <a:bodyPr/>
+                    <a:lstStyle/>
+                    <a:p>
+                      <a:pPr algn="ctr">
+                        <a:defRPr sz="1000" b="0">
+                          <a:solidFill>
+                            <a:srgbClr val="1F2937"/>
+                          </a:solidFill>
+                        </a:defRPr>
+                      </a:pPr>
+                      <a:r>
+                        <a:t>2015-Q3 → 2026-Q2</a:t>
+                      </a:r>
+                    </a:p>
+                  </a:txBody>
+                  <a:tcPr/>
+                </a:tc>
+              </a:tr>
+              <a:tr h="402336">
+                <a:tc>
+                  <a:txBody>
+                    <a:bodyPr/>
+                    <a:lstStyle/>
+                    <a:p>
+                      <a:pPr algn="ctr">
+                        <a:defRPr sz="1000" b="0">
+                          <a:solidFill>
+                            <a:srgbClr val="1F2937"/>
+                          </a:solidFill>
+                        </a:defRPr>
+                      </a:pPr>
+                      <a:r>
+                        <a:t>Alphabet (GOOGL)</a:t>
+                      </a:r>
+                    </a:p>
+                  </a:txBody>
+                  <a:tcPr/>
+                </a:tc>
+                <a:tc>
+                  <a:txBody>
+                    <a:bodyPr/>
+                    <a:lstStyle/>
+                    <a:p>
+                      <a:pPr algn="ctr">
+                        <a:defRPr sz="1000" b="0">
+                          <a:solidFill>
+                            <a:srgbClr val="1F2937"/>
+                          </a:solidFill>
+                        </a:defRPr>
+                      </a:pPr>
+                      <a:r>
+                        <a:t>Google Cloud</a:t>
+                      </a:r>
+                    </a:p>
+                  </a:txBody>
+                  <a:tcPr/>
+                </a:tc>
+                <a:tc>
+                  <a:txBody>
+                    <a:bodyPr/>
+                    <a:lstStyle/>
+                    <a:p>
+                      <a:pPr algn="ctr">
+                        <a:defRPr sz="1000" b="0">
+                          <a:solidFill>
+                            <a:srgbClr val="1F2937"/>
+                          </a:solidFill>
+                        </a:defRPr>
+                      </a:pPr>
+                      <a:r>
+                        <a:t>27</a:t>
+                      </a:r>
+                    </a:p>
+                  </a:txBody>
+                  <a:tcPr/>
+                </a:tc>
+                <a:tc>
+                  <a:txBody>
+                    <a:bodyPr/>
+                    <a:lstStyle/>
+                    <a:p>
+                      <a:pPr algn="ctr">
+                        <a:defRPr sz="1000" b="0">
+                          <a:solidFill>
+                            <a:srgbClr val="1F2937"/>
+                          </a:solidFill>
+                        </a:defRPr>
+                      </a:pPr>
+                      <a:r>
+                        <a:t>2019-Q4 → 2026-Q2</a:t>
+                      </a:r>
+                    </a:p>
+                  </a:txBody>
+                  <a:tcPr/>
+                </a:tc>
+              </a:tr>
+              <a:tr h="402336">
+                <a:tc>
+                  <a:txBody>
+                    <a:bodyPr/>
+                    <a:lstStyle/>
+                    <a:p>
+                      <a:pPr algn="ctr">
+                        <a:defRPr sz="1000" b="1">
+                          <a:solidFill>
+                            <a:srgbClr val="1F2937"/>
+                          </a:solidFill>
+                        </a:defRPr>
+                      </a:pPr>
+                      <a:r>
+                        <a:t>TOTAL PANEL</a:t>
+                      </a:r>
+                    </a:p>
+                  </a:txBody>
+                  <a:tcPr/>
+                </a:tc>
+                <a:tc>
+                  <a:txBody>
+                    <a:bodyPr/>
+                    <a:lstStyle/>
+                    <a:p>
+                      <a:pPr algn="ctr">
+                        <a:defRPr sz="1000" b="1">
+                          <a:solidFill>
+                            <a:srgbClr val="1F2937"/>
+                          </a:solidFill>
+                        </a:defRPr>
+                      </a:pPr>
+                    </a:p>
+                  </a:txBody>
+                  <a:tcPr/>
+                </a:tc>
+                <a:tc>
+                  <a:txBody>
+                    <a:bodyPr/>
+                    <a:lstStyle/>
+                    <a:p>
+                      <a:pPr algn="ctr">
+                        <a:defRPr sz="1000" b="1">
+                          <a:solidFill>
+                            <a:srgbClr val="1F2937"/>
+                          </a:solidFill>
+                        </a:defRPr>
+                      </a:pPr>
+                      <a:r>
+                        <a:t>121 rows</a:t>
+                      </a:r>
+                    </a:p>
+                  </a:txBody>
+                  <a:tcPr/>
+                </a:tc>
+                <a:tc>
+                  <a:txBody>
+                    <a:bodyPr/>
+                    <a:lstStyle/>
+                    <a:p>
+                      <a:pPr algn="ctr">
+                        <a:defRPr sz="1000" b="1">
+                          <a:solidFill>
+                            <a:srgbClr val="1F2937"/>
+                          </a:solidFill>
+                        </a:defRPr>
+                      </a:pPr>
+                      <a:r>
+                        <a:t>12+ years coverage</a:t>
+                      </a:r>
+                    </a:p>
+                  </a:txBody>
+                  <a:tcPr/>
+                </a:tc>
+              </a:tr>
+            </a:tbl>
+          </a:graphicData>
+        </a:graphic>
+      </p:graphicFrame>
+      <p:sp>
+        <p:nvSpPr>
+          <p:cNvPr id="8" name="TextBox 7"/>
           <p:cNvSpPr txBox="1"/>
           <p:nvPr/>
         </p:nvSpPr>
         <p:spPr>
           <a:xfrm>
-            <a:off x="731520" y="1737360"/>
-            <a:ext cx="10058400" cy="4114800"/>
+            <a:off x="8046720" y="2743200"/>
+            <a:ext cx="3657600" cy="2286000"/>
           </a:xfrm>
           <a:prstGeom prst="rect">
             <a:avLst/>
@@ -6765,15 +7545,14 @@
               <a:spcAft>
                 <a:spcPts val="400"/>
               </a:spcAft>
-              <a:defRPr sz="1400">
-                <a:solidFill>
-                  <a:srgbClr val="1F2937"/>
-                </a:solidFill>
-              </a:defRPr>
-            </a:pPr>
-            <a:r>
-              <a:rPr dirty="0"/>
-              <a:t>•  Amazon, Google, and Microsoft each spend $30B–$50B+ annually on AI datacenter infrastructure</a:t>
+              <a:defRPr sz="1100">
+                <a:solidFill>
+                  <a:srgbClr val="1B5E6B"/>
+                </a:solidFill>
+              </a:defRPr>
+            </a:pPr>
+            <a:r>
+              <a:t>✓  Zero chronological gaps (all quarter steps &lt; 110 days)</a:t>
             </a:r>
           </a:p>
           <a:p>
@@ -6781,15 +7560,14 @@
               <a:spcAft>
                 <a:spcPts val="400"/>
               </a:spcAft>
-              <a:defRPr sz="1400">
-                <a:solidFill>
-                  <a:srgbClr val="1F2937"/>
-                </a:solidFill>
-              </a:defRPr>
-            </a:pPr>
-            <a:r>
-              <a:rPr dirty="0"/>
-              <a:t>•  Implicit assumption: aggressive capex → faster cloud revenue growth after 1–4 quarter lag</a:t>
+              <a:defRPr sz="1100">
+                <a:solidFill>
+                  <a:srgbClr val="1B5E6B"/>
+                </a:solidFill>
+              </a:defRPr>
+            </a:pPr>
+            <a:r>
+              <a:t>✓  6 live cross-checks against primary 8-K releases (100% exact match)</a:t>
             </a:r>
           </a:p>
           <a:p>
@@ -6797,15 +7575,14 @@
               <a:spcAft>
                 <a:spcPts val="400"/>
               </a:spcAft>
-              <a:defRPr sz="1400">
-                <a:solidFill>
-                  <a:srgbClr val="1F2937"/>
-                </a:solidFill>
-              </a:defRPr>
-            </a:pPr>
-            <a:r>
-              <a:rPr dirty="0"/>
-              <a:t>•  CFOs need to know: Is this assumption empirically supported for short-term revenue guidance?</a:t>
+              <a:defRPr sz="1100">
+                <a:solidFill>
+                  <a:srgbClr val="1B5E6B"/>
+                </a:solidFill>
+              </a:defRPr>
+            </a:pPr>
+            <a:r>
+              <a:t>✓  MSFT FY24 segment recast ($-17%) flagged as structural_break</a:t>
             </a:r>
           </a:p>
           <a:p>
@@ -6813,168 +7590,14 @@
               <a:spcAft>
                 <a:spcPts val="400"/>
               </a:spcAft>
-              <a:defRPr sz="1400">
-                <a:solidFill>
-                  <a:srgbClr val="1F2937"/>
-                </a:solidFill>
-              </a:defRPr>
-            </a:pPr>
-            <a:endParaRPr dirty="0"/>
-          </a:p>
-          <a:p>
-            <a:pPr>
-              <a:spcAft>
-                <a:spcPts val="400"/>
-              </a:spcAft>
-              <a:defRPr sz="1400">
-                <a:solidFill>
-                  <a:srgbClr val="1F2937"/>
-                </a:solidFill>
-              </a:defRPr>
-            </a:pPr>
-            <a:r>
-              <a:rPr dirty="0"/>
-              <a:t>Three Testable Hypotheses:</a:t>
-            </a:r>
-          </a:p>
-          <a:p>
-            <a:pPr>
-              <a:spcAft>
-                <a:spcPts val="400"/>
-              </a:spcAft>
-              <a:defRPr sz="1400">
-                <a:solidFill>
-                  <a:srgbClr val="1F2937"/>
-                </a:solidFill>
-              </a:defRPr>
-            </a:pPr>
-            <a:r>
-              <a:rPr dirty="0"/>
-              <a:t>   H₁:  Capex growth (lag 1–4Q) predicts cloud revenue YoY growth</a:t>
-            </a:r>
-          </a:p>
-          <a:p>
-            <a:pPr>
-              <a:spcAft>
-                <a:spcPts val="400"/>
-              </a:spcAft>
-              <a:defRPr sz="1400">
-                <a:solidFill>
-                  <a:srgbClr val="1F2937"/>
-                </a:solidFill>
-              </a:defRPr>
-            </a:pPr>
-            <a:r>
-              <a:rPr dirty="0"/>
-              <a:t>   H₂:  ML models (Ridge, Lasso, </a:t>
-            </a:r>
-            <a:r>
-              <a:rPr dirty="0" err="1"/>
-              <a:t>XGBoost</a:t>
-            </a:r>
-            <a:r>
-              <a:rPr dirty="0"/>
-              <a:t>) beat a simple Naive baseline</a:t>
-            </a:r>
-          </a:p>
-          <a:p>
-            <a:pPr>
-              <a:spcAft>
-                <a:spcPts val="400"/>
-              </a:spcAft>
-              <a:defRPr sz="1400">
-                <a:solidFill>
-                  <a:srgbClr val="1F2937"/>
-                </a:solidFill>
-              </a:defRPr>
-            </a:pPr>
-            <a:r>
-              <a:rPr dirty="0"/>
-              <a:t>   H₃:  The capex–cloud relationship shifted in the 2023+ Generative AI era</a:t>
-            </a:r>
-          </a:p>
-        </p:txBody>
-      </p:sp>
-      <p:sp>
-        <p:nvSpPr>
-          <p:cNvPr id="8" name="Rounded Rectangle 7"/>
-          <p:cNvSpPr/>
-          <p:nvPr/>
-        </p:nvSpPr>
-        <p:spPr>
-          <a:xfrm>
-            <a:off x="7955280" y="2529840"/>
-            <a:ext cx="3840480" cy="1280160"/>
-          </a:xfrm>
-          <a:prstGeom prst="roundRect">
-            <a:avLst/>
-          </a:prstGeom>
-          <a:solidFill>
-            <a:srgbClr val="F0FDFA"/>
-          </a:solidFill>
-          <a:ln w="19050">
-            <a:solidFill>
-              <a:srgbClr val="1B5E6B"/>
-            </a:solidFill>
-          </a:ln>
-        </p:spPr>
-        <p:style>
-          <a:lnRef idx="1">
-            <a:schemeClr val="accent1"/>
-          </a:lnRef>
-          <a:fillRef idx="3">
-            <a:schemeClr val="accent1"/>
-          </a:fillRef>
-          <a:effectRef idx="2">
-            <a:schemeClr val="accent1"/>
-          </a:effectRef>
-          <a:fontRef idx="minor">
-            <a:schemeClr val="lt1"/>
-          </a:fontRef>
-        </p:style>
-        <p:txBody>
-          <a:bodyPr wrap="square" rtlCol="0" anchor="ctr"/>
-          <a:lstStyle/>
-          <a:p>
-            <a:pPr algn="ctr">
-              <a:defRPr sz="1100" b="1">
+              <a:defRPr sz="1100">
                 <a:solidFill>
                   <a:srgbClr val="1B5E6B"/>
                 </a:solidFill>
               </a:defRPr>
             </a:pPr>
             <a:r>
-              <a:rPr dirty="0"/>
-              <a:t>Primary Stakeholder</a:t>
-            </a:r>
-          </a:p>
-          <a:p>
-            <a:pPr>
-              <a:defRPr sz="1100">
-                <a:solidFill>
-                  <a:srgbClr val="1F2937"/>
-                </a:solidFill>
-              </a:defRPr>
-            </a:pPr>
-            <a:r>
-              <a:rPr dirty="0"/>
-              <a:t>Chief Financial Officer (CFO</a:t>
-            </a:r>
-            <a:r>
-              <a:rPr dirty="0" smtClean="0"/>
-              <a:t>)</a:t>
-            </a:r>
-            <a:r>
-              <a:rPr lang="en-US" dirty="0" smtClean="0"/>
-              <a:t> </a:t>
-            </a:r>
-            <a:r>
-              <a:rPr dirty="0" smtClean="0"/>
-              <a:t>&amp; </a:t>
-            </a:r>
-            <a:r>
-              <a:rPr dirty="0"/>
-              <a:t>Capital Allocation Committee</a:t>
+              <a:t>✓  All features lagged ≤ t-1 to prevent data leakage</a:t>
             </a:r>
           </a:p>
         </p:txBody>
@@ -6987,8 +7610,8 @@
 </p:sld>
 </file>
 
-<file path=ppt/slides/slide4.xml><?xml version="1.0" encoding="utf-8"?>
-<p:sld xmlns:a="http://schemas.openxmlformats.org/drawingml/2006/main" xmlns:r="http://schemas.openxmlformats.org/officeDocument/2006/relationships" xmlns:p="http://schemas.openxmlformats.org/presentationml/2006/main">
+<file path=ppt/slides/slide5.xml><?xml version="1.0" encoding="utf-8"?>
+<p:sld xmlns:a="http://schemas.openxmlformats.org/drawingml/2006/main" xmlns:p="http://schemas.openxmlformats.org/presentationml/2006/main" xmlns:r="http://schemas.openxmlformats.org/officeDocument/2006/relationships">
   <p:cSld>
     <p:bg>
       <p:bgPr>
@@ -7004,17 +7627,10 @@
         <p:cNvGrpSpPr/>
         <p:nvPr/>
       </p:nvGrpSpPr>
-      <p:grpSpPr>
-        <a:xfrm>
-          <a:off x="0" y="0"/>
-          <a:ext cx="0" cy="0"/>
-          <a:chOff x="0" y="0"/>
-          <a:chExt cx="0" cy="0"/>
-        </a:xfrm>
-      </p:grpSpPr>
+      <p:grpSpPr/>
       <p:pic>
         <p:nvPicPr>
-          <p:cNvPr id="2" name="Picture 1" descr="images.png"/>
+          <p:cNvPr id="2" name="Picture 1" descr="logo.png"/>
           <p:cNvPicPr>
             <a:picLocks noChangeAspect="1"/>
           </p:cNvPicPr>
@@ -7076,7 +7692,6 @@
           <a:lstStyle/>
           <a:p>
             <a:pPr algn="ctr"/>
-            <a:endParaRPr/>
           </a:p>
         </p:txBody>
       </p:sp>
@@ -7089,7 +7704,7 @@
         <p:spPr>
           <a:xfrm>
             <a:off x="731520" y="274320"/>
-            <a:ext cx="9144000" cy="548640"/>
+            <a:ext cx="10058400" cy="548640"/>
           </a:xfrm>
           <a:prstGeom prst="rect">
             <a:avLst/>
@@ -7110,7 +7725,7 @@
               </a:defRPr>
             </a:pPr>
             <a:r>
-              <a:t>Data Sources, Volume &amp; Quality Audit</a:t>
+              <a:t>Methodology: Walk-Forward Time-Series Validation</a:t>
             </a:r>
           </a:p>
         </p:txBody>
@@ -7155,7 +7770,6 @@
           <a:lstStyle/>
           <a:p>
             <a:pPr algn="ctr"/>
-            <a:endParaRPr/>
           </a:p>
         </p:txBody>
       </p:sp>
@@ -7168,7 +7782,7 @@
         <p:spPr>
           <a:xfrm>
             <a:off x="731520" y="1188720"/>
-            <a:ext cx="10058400" cy="1371600"/>
+            <a:ext cx="10515600" cy="5029200"/>
           </a:xfrm>
           <a:prstGeom prst="rect">
             <a:avLst/>
@@ -7192,7 +7806,7 @@
               </a:defRPr>
             </a:pPr>
             <a:r>
-              <a:t>•  SEC EDGAR XBRL (companyfacts): Consolidated quarterly financials (Revenue, Capex, OCF, Debt)</a:t>
+              <a:t>Why NOT use standard K-Fold Cross-Validation?</a:t>
             </a:r>
           </a:p>
           <a:p>
@@ -7207,7 +7821,7 @@
               </a:defRPr>
             </a:pPr>
             <a:r>
-              <a:t>•  SEC Form 8-K Exhibit 99.1: 121 manually curated &amp; cross-verified cloud segment revenue records</a:t>
+              <a:t>   →  K-Fold randomly shuffles observations, causing severe look-ahead data leakage</a:t>
             </a:r>
           </a:p>
           <a:p>
@@ -7222,541 +7836,34 @@
               </a:defRPr>
             </a:pPr>
             <a:r>
-              <a:t>•  FRED (St. Louis Fed): Federal Funds Rate quarterly macro series</a:t>
-            </a:r>
-          </a:p>
-        </p:txBody>
-      </p:sp>
-      <p:graphicFrame>
-        <p:nvGraphicFramePr>
-          <p:cNvPr id="7" name="Table 6"/>
-          <p:cNvGraphicFramePr>
-            <a:graphicFrameLocks noGrp="1"/>
-          </p:cNvGraphicFramePr>
-          <p:nvPr/>
-        </p:nvGraphicFramePr>
-        <p:xfrm>
-          <a:off x="731520" y="2743200"/>
-          <a:ext cx="6858000" cy="2011680"/>
-        </p:xfrm>
-        <a:graphic>
-          <a:graphicData uri="http://schemas.openxmlformats.org/drawingml/2006/table">
-            <a:tbl>
-              <a:tblPr firstRow="1" bandRow="1">
-                <a:tableStyleId>{5C22544A-7EE6-4342-B048-85BDC9FD1C3A}</a:tableStyleId>
-              </a:tblPr>
-              <a:tblGrid>
-                <a:gridCol w="1714500">
-                  <a:extLst>
-                    <a:ext uri="{9D8B030D-6E8A-4147-A177-3AD203B41FA5}">
-                      <a16:colId xmlns:a16="http://schemas.microsoft.com/office/drawing/2014/main" val="20000"/>
-                    </a:ext>
-                  </a:extLst>
-                </a:gridCol>
-                <a:gridCol w="1714500">
-                  <a:extLst>
-                    <a:ext uri="{9D8B030D-6E8A-4147-A177-3AD203B41FA5}">
-                      <a16:colId xmlns:a16="http://schemas.microsoft.com/office/drawing/2014/main" val="20001"/>
-                    </a:ext>
-                  </a:extLst>
-                </a:gridCol>
-                <a:gridCol w="1714500">
-                  <a:extLst>
-                    <a:ext uri="{9D8B030D-6E8A-4147-A177-3AD203B41FA5}">
-                      <a16:colId xmlns:a16="http://schemas.microsoft.com/office/drawing/2014/main" val="20002"/>
-                    </a:ext>
-                  </a:extLst>
-                </a:gridCol>
-                <a:gridCol w="1714500">
-                  <a:extLst>
-                    <a:ext uri="{9D8B030D-6E8A-4147-A177-3AD203B41FA5}">
-                      <a16:colId xmlns:a16="http://schemas.microsoft.com/office/drawing/2014/main" val="20003"/>
-                    </a:ext>
-                  </a:extLst>
-                </a:gridCol>
-              </a:tblGrid>
-              <a:tr h="402336">
-                <a:tc>
-                  <a:txBody>
-                    <a:bodyPr/>
-                    <a:lstStyle/>
-                    <a:p>
-                      <a:pPr algn="ctr">
-                        <a:defRPr sz="1100" b="1">
-                          <a:solidFill>
-                            <a:srgbClr val="FFFFFF"/>
-                          </a:solidFill>
-                        </a:defRPr>
-                      </a:pPr>
-                      <a:r>
-                        <a:t>Hyperscaler</a:t>
-                      </a:r>
-                    </a:p>
-                  </a:txBody>
-                  <a:tcPr>
-                    <a:solidFill>
-                      <a:srgbClr val="1B5E6B"/>
-                    </a:solidFill>
-                  </a:tcPr>
-                </a:tc>
-                <a:tc>
-                  <a:txBody>
-                    <a:bodyPr/>
-                    <a:lstStyle/>
-                    <a:p>
-                      <a:pPr algn="ctr">
-                        <a:defRPr sz="1100" b="1">
-                          <a:solidFill>
-                            <a:srgbClr val="FFFFFF"/>
-                          </a:solidFill>
-                        </a:defRPr>
-                      </a:pPr>
-                      <a:r>
-                        <a:t>Cloud Segment</a:t>
-                      </a:r>
-                    </a:p>
-                  </a:txBody>
-                  <a:tcPr>
-                    <a:solidFill>
-                      <a:srgbClr val="1B5E6B"/>
-                    </a:solidFill>
-                  </a:tcPr>
-                </a:tc>
-                <a:tc>
-                  <a:txBody>
-                    <a:bodyPr/>
-                    <a:lstStyle/>
-                    <a:p>
-                      <a:pPr algn="ctr">
-                        <a:defRPr sz="1100" b="1">
-                          <a:solidFill>
-                            <a:srgbClr val="FFFFFF"/>
-                          </a:solidFill>
-                        </a:defRPr>
-                      </a:pPr>
-                      <a:r>
-                        <a:t>Quarters</a:t>
-                      </a:r>
-                    </a:p>
-                  </a:txBody>
-                  <a:tcPr>
-                    <a:solidFill>
-                      <a:srgbClr val="1B5E6B"/>
-                    </a:solidFill>
-                  </a:tcPr>
-                </a:tc>
-                <a:tc>
-                  <a:txBody>
-                    <a:bodyPr/>
-                    <a:lstStyle/>
-                    <a:p>
-                      <a:pPr algn="ctr">
-                        <a:defRPr sz="1100" b="1">
-                          <a:solidFill>
-                            <a:srgbClr val="FFFFFF"/>
-                          </a:solidFill>
-                        </a:defRPr>
-                      </a:pPr>
-                      <a:r>
-                        <a:t>Period</a:t>
-                      </a:r>
-                    </a:p>
-                  </a:txBody>
-                  <a:tcPr>
-                    <a:solidFill>
-                      <a:srgbClr val="1B5E6B"/>
-                    </a:solidFill>
-                  </a:tcPr>
-                </a:tc>
-                <a:extLst>
-                  <a:ext uri="{0D108BD9-81ED-4DB2-BD59-A6C34878D82A}">
-                    <a16:rowId xmlns:a16="http://schemas.microsoft.com/office/drawing/2014/main" val="10000"/>
-                  </a:ext>
-                </a:extLst>
-              </a:tr>
-              <a:tr h="402336">
-                <a:tc>
-                  <a:txBody>
-                    <a:bodyPr/>
-                    <a:lstStyle/>
-                    <a:p>
-                      <a:pPr algn="ctr">
-                        <a:defRPr sz="1000" b="0">
-                          <a:solidFill>
-                            <a:srgbClr val="1F2937"/>
-                          </a:solidFill>
-                        </a:defRPr>
-                      </a:pPr>
-                      <a:r>
-                        <a:t>Amazon (AMZN)</a:t>
-                      </a:r>
-                    </a:p>
-                  </a:txBody>
-                  <a:tcPr/>
-                </a:tc>
-                <a:tc>
-                  <a:txBody>
-                    <a:bodyPr/>
-                    <a:lstStyle/>
-                    <a:p>
-                      <a:pPr algn="ctr">
-                        <a:defRPr sz="1000" b="0">
-                          <a:solidFill>
-                            <a:srgbClr val="1F2937"/>
-                          </a:solidFill>
-                        </a:defRPr>
-                      </a:pPr>
-                      <a:r>
-                        <a:t>AWS</a:t>
-                      </a:r>
-                    </a:p>
-                  </a:txBody>
-                  <a:tcPr/>
-                </a:tc>
-                <a:tc>
-                  <a:txBody>
-                    <a:bodyPr/>
-                    <a:lstStyle/>
-                    <a:p>
-                      <a:pPr algn="ctr">
-                        <a:defRPr sz="1000" b="0">
-                          <a:solidFill>
-                            <a:srgbClr val="1F2937"/>
-                          </a:solidFill>
-                        </a:defRPr>
-                      </a:pPr>
-                      <a:r>
-                        <a:t>50</a:t>
-                      </a:r>
-                    </a:p>
-                  </a:txBody>
-                  <a:tcPr/>
-                </a:tc>
-                <a:tc>
-                  <a:txBody>
-                    <a:bodyPr/>
-                    <a:lstStyle/>
-                    <a:p>
-                      <a:pPr algn="ctr">
-                        <a:defRPr sz="1000" b="0">
-                          <a:solidFill>
-                            <a:srgbClr val="1F2937"/>
-                          </a:solidFill>
-                        </a:defRPr>
-                      </a:pPr>
-                      <a:r>
-                        <a:t>2014-Q1 → 2026-Q2</a:t>
-                      </a:r>
-                    </a:p>
-                  </a:txBody>
-                  <a:tcPr/>
-                </a:tc>
-                <a:extLst>
-                  <a:ext uri="{0D108BD9-81ED-4DB2-BD59-A6C34878D82A}">
-                    <a16:rowId xmlns:a16="http://schemas.microsoft.com/office/drawing/2014/main" val="10001"/>
-                  </a:ext>
-                </a:extLst>
-              </a:tr>
-              <a:tr h="402336">
-                <a:tc>
-                  <a:txBody>
-                    <a:bodyPr/>
-                    <a:lstStyle/>
-                    <a:p>
-                      <a:pPr algn="ctr">
-                        <a:defRPr sz="1000" b="0">
-                          <a:solidFill>
-                            <a:srgbClr val="1F2937"/>
-                          </a:solidFill>
-                        </a:defRPr>
-                      </a:pPr>
-                      <a:r>
-                        <a:t>Microsoft (MSFT)</a:t>
-                      </a:r>
-                    </a:p>
-                  </a:txBody>
-                  <a:tcPr/>
-                </a:tc>
-                <a:tc>
-                  <a:txBody>
-                    <a:bodyPr/>
-                    <a:lstStyle/>
-                    <a:p>
-                      <a:pPr algn="ctr">
-                        <a:defRPr sz="1000" b="0">
-                          <a:solidFill>
-                            <a:srgbClr val="1F2937"/>
-                          </a:solidFill>
-                        </a:defRPr>
-                      </a:pPr>
-                      <a:r>
-                        <a:t>Intelligent Cloud</a:t>
-                      </a:r>
-                    </a:p>
-                  </a:txBody>
-                  <a:tcPr/>
-                </a:tc>
-                <a:tc>
-                  <a:txBody>
-                    <a:bodyPr/>
-                    <a:lstStyle/>
-                    <a:p>
-                      <a:pPr algn="ctr">
-                        <a:defRPr sz="1000" b="0">
-                          <a:solidFill>
-                            <a:srgbClr val="1F2937"/>
-                          </a:solidFill>
-                        </a:defRPr>
-                      </a:pPr>
-                      <a:r>
-                        <a:t>44</a:t>
-                      </a:r>
-                    </a:p>
-                  </a:txBody>
-                  <a:tcPr/>
-                </a:tc>
-                <a:tc>
-                  <a:txBody>
-                    <a:bodyPr/>
-                    <a:lstStyle/>
-                    <a:p>
-                      <a:pPr algn="ctr">
-                        <a:defRPr sz="1000" b="0">
-                          <a:solidFill>
-                            <a:srgbClr val="1F2937"/>
-                          </a:solidFill>
-                        </a:defRPr>
-                      </a:pPr>
-                      <a:r>
-                        <a:t>2015-Q3 → 2026-Q2</a:t>
-                      </a:r>
-                    </a:p>
-                  </a:txBody>
-                  <a:tcPr/>
-                </a:tc>
-                <a:extLst>
-                  <a:ext uri="{0D108BD9-81ED-4DB2-BD59-A6C34878D82A}">
-                    <a16:rowId xmlns:a16="http://schemas.microsoft.com/office/drawing/2014/main" val="10002"/>
-                  </a:ext>
-                </a:extLst>
-              </a:tr>
-              <a:tr h="402336">
-                <a:tc>
-                  <a:txBody>
-                    <a:bodyPr/>
-                    <a:lstStyle/>
-                    <a:p>
-                      <a:pPr algn="ctr">
-                        <a:defRPr sz="1000" b="0">
-                          <a:solidFill>
-                            <a:srgbClr val="1F2937"/>
-                          </a:solidFill>
-                        </a:defRPr>
-                      </a:pPr>
-                      <a:r>
-                        <a:t>Alphabet (GOOGL)</a:t>
-                      </a:r>
-                    </a:p>
-                  </a:txBody>
-                  <a:tcPr/>
-                </a:tc>
-                <a:tc>
-                  <a:txBody>
-                    <a:bodyPr/>
-                    <a:lstStyle/>
-                    <a:p>
-                      <a:pPr algn="ctr">
-                        <a:defRPr sz="1000" b="0">
-                          <a:solidFill>
-                            <a:srgbClr val="1F2937"/>
-                          </a:solidFill>
-                        </a:defRPr>
-                      </a:pPr>
-                      <a:r>
-                        <a:t>Google Cloud</a:t>
-                      </a:r>
-                    </a:p>
-                  </a:txBody>
-                  <a:tcPr/>
-                </a:tc>
-                <a:tc>
-                  <a:txBody>
-                    <a:bodyPr/>
-                    <a:lstStyle/>
-                    <a:p>
-                      <a:pPr algn="ctr">
-                        <a:defRPr sz="1000" b="0">
-                          <a:solidFill>
-                            <a:srgbClr val="1F2937"/>
-                          </a:solidFill>
-                        </a:defRPr>
-                      </a:pPr>
-                      <a:r>
-                        <a:t>27</a:t>
-                      </a:r>
-                    </a:p>
-                  </a:txBody>
-                  <a:tcPr/>
-                </a:tc>
-                <a:tc>
-                  <a:txBody>
-                    <a:bodyPr/>
-                    <a:lstStyle/>
-                    <a:p>
-                      <a:pPr algn="ctr">
-                        <a:defRPr sz="1000" b="0">
-                          <a:solidFill>
-                            <a:srgbClr val="1F2937"/>
-                          </a:solidFill>
-                        </a:defRPr>
-                      </a:pPr>
-                      <a:r>
-                        <a:t>2019-Q4 → 2026-Q2</a:t>
-                      </a:r>
-                    </a:p>
-                  </a:txBody>
-                  <a:tcPr/>
-                </a:tc>
-                <a:extLst>
-                  <a:ext uri="{0D108BD9-81ED-4DB2-BD59-A6C34878D82A}">
-                    <a16:rowId xmlns:a16="http://schemas.microsoft.com/office/drawing/2014/main" val="10003"/>
-                  </a:ext>
-                </a:extLst>
-              </a:tr>
-              <a:tr h="402336">
-                <a:tc>
-                  <a:txBody>
-                    <a:bodyPr/>
-                    <a:lstStyle/>
-                    <a:p>
-                      <a:pPr algn="ctr">
-                        <a:defRPr sz="1000" b="1">
-                          <a:solidFill>
-                            <a:srgbClr val="1F2937"/>
-                          </a:solidFill>
-                        </a:defRPr>
-                      </a:pPr>
-                      <a:r>
-                        <a:t>TOTAL PANEL</a:t>
-                      </a:r>
-                    </a:p>
-                  </a:txBody>
-                  <a:tcPr/>
-                </a:tc>
-                <a:tc>
-                  <a:txBody>
-                    <a:bodyPr/>
-                    <a:lstStyle/>
-                    <a:p>
-                      <a:pPr algn="ctr">
-                        <a:defRPr sz="1000" b="1">
-                          <a:solidFill>
-                            <a:srgbClr val="1F2937"/>
-                          </a:solidFill>
-                        </a:defRPr>
-                      </a:pPr>
-                      <a:endParaRPr/>
-                    </a:p>
-                  </a:txBody>
-                  <a:tcPr/>
-                </a:tc>
-                <a:tc>
-                  <a:txBody>
-                    <a:bodyPr/>
-                    <a:lstStyle/>
-                    <a:p>
-                      <a:pPr algn="ctr">
-                        <a:defRPr sz="1000" b="1">
-                          <a:solidFill>
-                            <a:srgbClr val="1F2937"/>
-                          </a:solidFill>
-                        </a:defRPr>
-                      </a:pPr>
-                      <a:r>
-                        <a:t>121 rows</a:t>
-                      </a:r>
-                    </a:p>
-                  </a:txBody>
-                  <a:tcPr/>
-                </a:tc>
-                <a:tc>
-                  <a:txBody>
-                    <a:bodyPr/>
-                    <a:lstStyle/>
-                    <a:p>
-                      <a:pPr algn="ctr">
-                        <a:defRPr sz="1000" b="1">
-                          <a:solidFill>
-                            <a:srgbClr val="1F2937"/>
-                          </a:solidFill>
-                        </a:defRPr>
-                      </a:pPr>
-                      <a:r>
-                        <a:t>12+ years coverage</a:t>
-                      </a:r>
-                    </a:p>
-                  </a:txBody>
-                  <a:tcPr/>
-                </a:tc>
-                <a:extLst>
-                  <a:ext uri="{0D108BD9-81ED-4DB2-BD59-A6C34878D82A}">
-                    <a16:rowId xmlns:a16="http://schemas.microsoft.com/office/drawing/2014/main" val="10004"/>
-                  </a:ext>
-                </a:extLst>
-              </a:tr>
-            </a:tbl>
-          </a:graphicData>
-        </a:graphic>
-      </p:graphicFrame>
-      <p:sp>
-        <p:nvSpPr>
-          <p:cNvPr id="8" name="TextBox 7"/>
-          <p:cNvSpPr txBox="1"/>
-          <p:nvPr/>
-        </p:nvSpPr>
-        <p:spPr>
-          <a:xfrm>
-            <a:off x="8046720" y="2743200"/>
-            <a:ext cx="3657600" cy="2286000"/>
-          </a:xfrm>
-          <a:prstGeom prst="rect">
-            <a:avLst/>
-          </a:prstGeom>
-          <a:noFill/>
-        </p:spPr>
-        <p:txBody>
-          <a:bodyPr wrap="square">
-            <a:spAutoFit/>
-          </a:bodyPr>
-          <a:lstStyle/>
+              <a:t>   →  Future quarterly data would contaminate the training set — invalid for time-series</a:t>
+            </a:r>
+          </a:p>
           <a:p>
             <a:pPr>
               <a:spcAft>
                 <a:spcPts val="400"/>
               </a:spcAft>
-              <a:defRPr sz="1100">
-                <a:solidFill>
-                  <a:srgbClr val="1B5E6B"/>
-                </a:solidFill>
-              </a:defRPr>
-            </a:pPr>
-            <a:r>
-              <a:t>✓  Zero chronological gaps (all quarter steps &lt; 110 days)</a:t>
-            </a:r>
+              <a:defRPr sz="1300">
+                <a:solidFill>
+                  <a:srgbClr val="1F2937"/>
+                </a:solidFill>
+              </a:defRPr>
+            </a:pPr>
           </a:p>
           <a:p>
             <a:pPr>
               <a:spcAft>
                 <a:spcPts val="400"/>
               </a:spcAft>
-              <a:defRPr sz="1100">
-                <a:solidFill>
-                  <a:srgbClr val="1B5E6B"/>
-                </a:solidFill>
-              </a:defRPr>
-            </a:pPr>
-            <a:r>
-              <a:t>✓  6 live cross-checks against primary 8-K releases (100% exact match)</a:t>
+              <a:defRPr sz="1300">
+                <a:solidFill>
+                  <a:srgbClr val="1F2937"/>
+                </a:solidFill>
+              </a:defRPr>
+            </a:pPr>
+            <a:r>
+              <a:t>Our Approach: One-Step-Ahead Expanding-Window Walk-Forward</a:t>
             </a:r>
           </a:p>
           <a:p>
@@ -7764,14 +7871,14 @@
               <a:spcAft>
                 <a:spcPts val="400"/>
               </a:spcAft>
-              <a:defRPr sz="1100">
-                <a:solidFill>
-                  <a:srgbClr val="1B5E6B"/>
-                </a:solidFill>
-              </a:defRPr>
-            </a:pPr>
-            <a:r>
-              <a:t>✓  MSFT FY24 segment recast ($-17%) flagged as structural_break</a:t>
+              <a:defRPr sz="1300">
+                <a:solidFill>
+                  <a:srgbClr val="1F2937"/>
+                </a:solidFill>
+              </a:defRPr>
+            </a:pPr>
+            <a:r>
+              <a:t>   1.  Start with minimum 8-quarter burn-in training window</a:t>
             </a:r>
           </a:p>
           <a:p>
@@ -7779,14 +7886,146 @@
               <a:spcAft>
                 <a:spcPts val="400"/>
               </a:spcAft>
-              <a:defRPr sz="1100">
-                <a:solidFill>
-                  <a:srgbClr val="1B5E6B"/>
-                </a:solidFill>
-              </a:defRPr>
-            </a:pPr>
-            <a:r>
-              <a:t>✓  All features lagged ≤ t-1 to prevent data leakage</a:t>
+              <a:defRPr sz="1300">
+                <a:solidFill>
+                  <a:srgbClr val="1F2937"/>
+                </a:solidFill>
+              </a:defRPr>
+            </a:pPr>
+            <a:r>
+              <a:t>   2.  At each step t, train ONLY on historical quarters [0, 1, ..., t-1]</a:t>
+            </a:r>
+          </a:p>
+          <a:p>
+            <a:pPr>
+              <a:spcAft>
+                <a:spcPts val="400"/>
+              </a:spcAft>
+              <a:defRPr sz="1300">
+                <a:solidFill>
+                  <a:srgbClr val="1F2937"/>
+                </a:solidFill>
+              </a:defRPr>
+            </a:pPr>
+            <a:r>
+              <a:t>   3.  Predict the single out-of-sample quarter t</a:t>
+            </a:r>
+          </a:p>
+          <a:p>
+            <a:pPr>
+              <a:spcAft>
+                <a:spcPts val="400"/>
+              </a:spcAft>
+              <a:defRPr sz="1300">
+                <a:solidFill>
+                  <a:srgbClr val="1F2937"/>
+                </a:solidFill>
+              </a:defRPr>
+            </a:pPr>
+            <a:r>
+              <a:t>   4.  Expand window to include t, repeat until end of series</a:t>
+            </a:r>
+          </a:p>
+          <a:p>
+            <a:pPr>
+              <a:spcAft>
+                <a:spcPts val="400"/>
+              </a:spcAft>
+              <a:defRPr sz="1300">
+                <a:solidFill>
+                  <a:srgbClr val="1F2937"/>
+                </a:solidFill>
+              </a:defRPr>
+            </a:pPr>
+            <a:r>
+              <a:t>   5.  StandardScaler fitted exclusively on training partition (no test peeking)</a:t>
+            </a:r>
+          </a:p>
+          <a:p>
+            <a:pPr>
+              <a:spcAft>
+                <a:spcPts val="400"/>
+              </a:spcAft>
+              <a:defRPr sz="1300">
+                <a:solidFill>
+                  <a:srgbClr val="1F2937"/>
+                </a:solidFill>
+              </a:defRPr>
+            </a:pPr>
+          </a:p>
+          <a:p>
+            <a:pPr>
+              <a:spcAft>
+                <a:spcPts val="400"/>
+              </a:spcAft>
+              <a:defRPr sz="1300">
+                <a:solidFill>
+                  <a:srgbClr val="1F2937"/>
+                </a:solidFill>
+              </a:defRPr>
+            </a:pPr>
+            <a:r>
+              <a:t>Evaluation Metrics (Regression, NOT Classification):</a:t>
+            </a:r>
+          </a:p>
+          <a:p>
+            <a:pPr>
+              <a:spcAft>
+                <a:spcPts val="400"/>
+              </a:spcAft>
+              <a:defRPr sz="1300">
+                <a:solidFill>
+                  <a:srgbClr val="1F2937"/>
+                </a:solidFill>
+              </a:defRPr>
+            </a:pPr>
+            <a:r>
+              <a:t>   •  RMSE (Root Mean Squared Error) — primary metric, penalizes large errors heavily</a:t>
+            </a:r>
+          </a:p>
+          <a:p>
+            <a:pPr>
+              <a:spcAft>
+                <a:spcPts val="400"/>
+              </a:spcAft>
+              <a:defRPr sz="1300">
+                <a:solidFill>
+                  <a:srgbClr val="1F2937"/>
+                </a:solidFill>
+              </a:defRPr>
+            </a:pPr>
+            <a:r>
+              <a:t>   •  MAE (Mean Absolute Error) — interpretable in percentage-point units</a:t>
+            </a:r>
+          </a:p>
+          <a:p>
+            <a:pPr>
+              <a:spcAft>
+                <a:spcPts val="400"/>
+              </a:spcAft>
+              <a:defRPr sz="1300">
+                <a:solidFill>
+                  <a:srgbClr val="1F2937"/>
+                </a:solidFill>
+              </a:defRPr>
+            </a:pPr>
+            <a:r>
+              <a:t>   •  Directional Accuracy — % of correct up/down direction calls</a:t>
+            </a:r>
+          </a:p>
+          <a:p>
+            <a:pPr>
+              <a:spcAft>
+                <a:spcPts val="400"/>
+              </a:spcAft>
+              <a:defRPr sz="1300">
+                <a:solidFill>
+                  <a:srgbClr val="1F2937"/>
+                </a:solidFill>
+              </a:defRPr>
+            </a:pPr>
+            <a:r>
+              <a:t>   •  F1-Score / Precision / Recall NOT applicable (continuous target, not binary labels)</a:t>
             </a:r>
           </a:p>
         </p:txBody>
@@ -7799,8 +8038,8 @@
 </p:sld>
 </file>
 
-<file path=ppt/slides/slide5.xml><?xml version="1.0" encoding="utf-8"?>
-<p:sld xmlns:a="http://schemas.openxmlformats.org/drawingml/2006/main" xmlns:r="http://schemas.openxmlformats.org/officeDocument/2006/relationships" xmlns:p="http://schemas.openxmlformats.org/presentationml/2006/main">
+<file path=ppt/slides/slide6.xml><?xml version="1.0" encoding="utf-8"?>
+<p:sld xmlns:a="http://schemas.openxmlformats.org/drawingml/2006/main" xmlns:p="http://schemas.openxmlformats.org/presentationml/2006/main" xmlns:r="http://schemas.openxmlformats.org/officeDocument/2006/relationships">
   <p:cSld>
     <p:bg>
       <p:bgPr>
@@ -7816,17 +8055,10 @@
         <p:cNvGrpSpPr/>
         <p:nvPr/>
       </p:nvGrpSpPr>
-      <p:grpSpPr>
-        <a:xfrm>
-          <a:off x="0" y="0"/>
-          <a:ext cx="0" cy="0"/>
-          <a:chOff x="0" y="0"/>
-          <a:chExt cx="0" cy="0"/>
-        </a:xfrm>
-      </p:grpSpPr>
+      <p:grpSpPr/>
       <p:pic>
         <p:nvPicPr>
-          <p:cNvPr id="2" name="Picture 1" descr="images.png"/>
+          <p:cNvPr id="2" name="Picture 1" descr="logo.png"/>
           <p:cNvPicPr>
             <a:picLocks noChangeAspect="1"/>
           </p:cNvPicPr>
@@ -7888,7 +8120,6 @@
           <a:lstStyle/>
           <a:p>
             <a:pPr algn="ctr"/>
-            <a:endParaRPr/>
           </a:p>
         </p:txBody>
       </p:sp>
@@ -7901,7 +8132,7 @@
         <p:spPr>
           <a:xfrm>
             <a:off x="731520" y="274320"/>
-            <a:ext cx="10058400" cy="548640"/>
+            <a:ext cx="9144000" cy="548640"/>
           </a:xfrm>
           <a:prstGeom prst="rect">
             <a:avLst/>
@@ -7922,7 +8153,7 @@
               </a:defRPr>
             </a:pPr>
             <a:r>
-              <a:t>Methodology: Walk-Forward Time-Series Validation</a:t>
+              <a:t>Five Models Evaluated</a:t>
             </a:r>
           </a:p>
         </p:txBody>
@@ -7967,446 +8198,6 @@
           <a:lstStyle/>
           <a:p>
             <a:pPr algn="ctr"/>
-            <a:endParaRPr/>
-          </a:p>
-        </p:txBody>
-      </p:sp>
-      <p:sp>
-        <p:nvSpPr>
-          <p:cNvPr id="6" name="TextBox 5"/>
-          <p:cNvSpPr txBox="1"/>
-          <p:nvPr/>
-        </p:nvSpPr>
-        <p:spPr>
-          <a:xfrm>
-            <a:off x="731520" y="1188720"/>
-            <a:ext cx="10515600" cy="5029200"/>
-          </a:xfrm>
-          <a:prstGeom prst="rect">
-            <a:avLst/>
-          </a:prstGeom>
-          <a:noFill/>
-        </p:spPr>
-        <p:txBody>
-          <a:bodyPr wrap="square">
-            <a:spAutoFit/>
-          </a:bodyPr>
-          <a:lstStyle/>
-          <a:p>
-            <a:pPr>
-              <a:spcAft>
-                <a:spcPts val="400"/>
-              </a:spcAft>
-              <a:defRPr sz="1300">
-                <a:solidFill>
-                  <a:srgbClr val="1F2937"/>
-                </a:solidFill>
-              </a:defRPr>
-            </a:pPr>
-            <a:r>
-              <a:t>Why NOT use standard K-Fold Cross-Validation?</a:t>
-            </a:r>
-          </a:p>
-          <a:p>
-            <a:pPr>
-              <a:spcAft>
-                <a:spcPts val="400"/>
-              </a:spcAft>
-              <a:defRPr sz="1300">
-                <a:solidFill>
-                  <a:srgbClr val="1F2937"/>
-                </a:solidFill>
-              </a:defRPr>
-            </a:pPr>
-            <a:r>
-              <a:t>   →  K-Fold randomly shuffles observations, causing severe look-ahead data leakage</a:t>
-            </a:r>
-          </a:p>
-          <a:p>
-            <a:pPr>
-              <a:spcAft>
-                <a:spcPts val="400"/>
-              </a:spcAft>
-              <a:defRPr sz="1300">
-                <a:solidFill>
-                  <a:srgbClr val="1F2937"/>
-                </a:solidFill>
-              </a:defRPr>
-            </a:pPr>
-            <a:r>
-              <a:t>   →  Future quarterly data would contaminate the training set — invalid for time-series</a:t>
-            </a:r>
-          </a:p>
-          <a:p>
-            <a:pPr>
-              <a:spcAft>
-                <a:spcPts val="400"/>
-              </a:spcAft>
-              <a:defRPr sz="1300">
-                <a:solidFill>
-                  <a:srgbClr val="1F2937"/>
-                </a:solidFill>
-              </a:defRPr>
-            </a:pPr>
-            <a:endParaRPr/>
-          </a:p>
-          <a:p>
-            <a:pPr>
-              <a:spcAft>
-                <a:spcPts val="400"/>
-              </a:spcAft>
-              <a:defRPr sz="1300">
-                <a:solidFill>
-                  <a:srgbClr val="1F2937"/>
-                </a:solidFill>
-              </a:defRPr>
-            </a:pPr>
-            <a:r>
-              <a:t>Our Approach: One-Step-Ahead Expanding-Window Walk-Forward</a:t>
-            </a:r>
-          </a:p>
-          <a:p>
-            <a:pPr>
-              <a:spcAft>
-                <a:spcPts val="400"/>
-              </a:spcAft>
-              <a:defRPr sz="1300">
-                <a:solidFill>
-                  <a:srgbClr val="1F2937"/>
-                </a:solidFill>
-              </a:defRPr>
-            </a:pPr>
-            <a:r>
-              <a:t>   1.  Start with minimum 8-quarter burn-in training window</a:t>
-            </a:r>
-          </a:p>
-          <a:p>
-            <a:pPr>
-              <a:spcAft>
-                <a:spcPts val="400"/>
-              </a:spcAft>
-              <a:defRPr sz="1300">
-                <a:solidFill>
-                  <a:srgbClr val="1F2937"/>
-                </a:solidFill>
-              </a:defRPr>
-            </a:pPr>
-            <a:r>
-              <a:t>   2.  At each step t, train ONLY on historical quarters [0, 1, ..., t-1]</a:t>
-            </a:r>
-          </a:p>
-          <a:p>
-            <a:pPr>
-              <a:spcAft>
-                <a:spcPts val="400"/>
-              </a:spcAft>
-              <a:defRPr sz="1300">
-                <a:solidFill>
-                  <a:srgbClr val="1F2937"/>
-                </a:solidFill>
-              </a:defRPr>
-            </a:pPr>
-            <a:r>
-              <a:t>   3.  Predict the single out-of-sample quarter t</a:t>
-            </a:r>
-          </a:p>
-          <a:p>
-            <a:pPr>
-              <a:spcAft>
-                <a:spcPts val="400"/>
-              </a:spcAft>
-              <a:defRPr sz="1300">
-                <a:solidFill>
-                  <a:srgbClr val="1F2937"/>
-                </a:solidFill>
-              </a:defRPr>
-            </a:pPr>
-            <a:r>
-              <a:t>   4.  Expand window to include t, repeat until end of series</a:t>
-            </a:r>
-          </a:p>
-          <a:p>
-            <a:pPr>
-              <a:spcAft>
-                <a:spcPts val="400"/>
-              </a:spcAft>
-              <a:defRPr sz="1300">
-                <a:solidFill>
-                  <a:srgbClr val="1F2937"/>
-                </a:solidFill>
-              </a:defRPr>
-            </a:pPr>
-            <a:r>
-              <a:t>   5.  StandardScaler fitted exclusively on training partition (no test peeking)</a:t>
-            </a:r>
-          </a:p>
-          <a:p>
-            <a:pPr>
-              <a:spcAft>
-                <a:spcPts val="400"/>
-              </a:spcAft>
-              <a:defRPr sz="1300">
-                <a:solidFill>
-                  <a:srgbClr val="1F2937"/>
-                </a:solidFill>
-              </a:defRPr>
-            </a:pPr>
-            <a:endParaRPr/>
-          </a:p>
-          <a:p>
-            <a:pPr>
-              <a:spcAft>
-                <a:spcPts val="400"/>
-              </a:spcAft>
-              <a:defRPr sz="1300">
-                <a:solidFill>
-                  <a:srgbClr val="1F2937"/>
-                </a:solidFill>
-              </a:defRPr>
-            </a:pPr>
-            <a:r>
-              <a:t>Evaluation Metrics (Regression, NOT Classification):</a:t>
-            </a:r>
-          </a:p>
-          <a:p>
-            <a:pPr>
-              <a:spcAft>
-                <a:spcPts val="400"/>
-              </a:spcAft>
-              <a:defRPr sz="1300">
-                <a:solidFill>
-                  <a:srgbClr val="1F2937"/>
-                </a:solidFill>
-              </a:defRPr>
-            </a:pPr>
-            <a:r>
-              <a:t>   •  RMSE (Root Mean Squared Error) — primary metric, penalizes large errors heavily</a:t>
-            </a:r>
-          </a:p>
-          <a:p>
-            <a:pPr>
-              <a:spcAft>
-                <a:spcPts val="400"/>
-              </a:spcAft>
-              <a:defRPr sz="1300">
-                <a:solidFill>
-                  <a:srgbClr val="1F2937"/>
-                </a:solidFill>
-              </a:defRPr>
-            </a:pPr>
-            <a:r>
-              <a:t>   •  MAE (Mean Absolute Error) — interpretable in percentage-point units</a:t>
-            </a:r>
-          </a:p>
-          <a:p>
-            <a:pPr>
-              <a:spcAft>
-                <a:spcPts val="400"/>
-              </a:spcAft>
-              <a:defRPr sz="1300">
-                <a:solidFill>
-                  <a:srgbClr val="1F2937"/>
-                </a:solidFill>
-              </a:defRPr>
-            </a:pPr>
-            <a:r>
-              <a:t>   •  Directional Accuracy — % of correct up/down direction calls</a:t>
-            </a:r>
-          </a:p>
-          <a:p>
-            <a:pPr>
-              <a:spcAft>
-                <a:spcPts val="400"/>
-              </a:spcAft>
-              <a:defRPr sz="1300">
-                <a:solidFill>
-                  <a:srgbClr val="1F2937"/>
-                </a:solidFill>
-              </a:defRPr>
-            </a:pPr>
-            <a:r>
-              <a:t>   •  F1-Score / Precision / Recall NOT applicable (continuous target, not binary labels)</a:t>
-            </a:r>
-          </a:p>
-        </p:txBody>
-      </p:sp>
-    </p:spTree>
-  </p:cSld>
-  <p:clrMapOvr>
-    <a:masterClrMapping/>
-  </p:clrMapOvr>
-</p:sld>
-</file>
-
-<file path=ppt/slides/slide6.xml><?xml version="1.0" encoding="utf-8"?>
-<p:sld xmlns:a="http://schemas.openxmlformats.org/drawingml/2006/main" xmlns:r="http://schemas.openxmlformats.org/officeDocument/2006/relationships" xmlns:p="http://schemas.openxmlformats.org/presentationml/2006/main">
-  <p:cSld>
-    <p:bg>
-      <p:bgPr>
-        <a:solidFill>
-          <a:srgbClr val="FFFFFF"/>
-        </a:solidFill>
-        <a:effectLst/>
-      </p:bgPr>
-    </p:bg>
-    <p:spTree>
-      <p:nvGrpSpPr>
-        <p:cNvPr id="1" name=""/>
-        <p:cNvGrpSpPr/>
-        <p:nvPr/>
-      </p:nvGrpSpPr>
-      <p:grpSpPr>
-        <a:xfrm>
-          <a:off x="0" y="0"/>
-          <a:ext cx="0" cy="0"/>
-          <a:chOff x="0" y="0"/>
-          <a:chExt cx="0" cy="0"/>
-        </a:xfrm>
-      </p:grpSpPr>
-      <p:pic>
-        <p:nvPicPr>
-          <p:cNvPr id="2" name="Picture 1" descr="images.png"/>
-          <p:cNvPicPr>
-            <a:picLocks noChangeAspect="1"/>
-          </p:cNvPicPr>
-          <p:nvPr/>
-        </p:nvPicPr>
-        <p:blipFill>
-          <a:blip r:embed="rId2"/>
-          <a:stretch>
-            <a:fillRect/>
-          </a:stretch>
-        </p:blipFill>
-        <p:spPr>
-          <a:xfrm>
-            <a:off x="320040" y="228600"/>
-            <a:ext cx="548640" cy="548640"/>
-          </a:xfrm>
-          <a:prstGeom prst="rect">
-            <a:avLst/>
-          </a:prstGeom>
-        </p:spPr>
-      </p:pic>
-      <p:sp>
-        <p:nvSpPr>
-          <p:cNvPr id="3" name="Rectangle 2"/>
-          <p:cNvSpPr/>
-          <p:nvPr/>
-        </p:nvSpPr>
-        <p:spPr>
-          <a:xfrm>
-            <a:off x="0" y="6693408"/>
-            <a:ext cx="12191695" cy="164592"/>
-          </a:xfrm>
-          <a:prstGeom prst="rect">
-            <a:avLst/>
-          </a:prstGeom>
-          <a:solidFill>
-            <a:srgbClr val="1B5E6B"/>
-          </a:solidFill>
-          <a:ln>
-            <a:noFill/>
-          </a:ln>
-        </p:spPr>
-        <p:style>
-          <a:lnRef idx="1">
-            <a:schemeClr val="accent1"/>
-          </a:lnRef>
-          <a:fillRef idx="3">
-            <a:schemeClr val="accent1"/>
-          </a:fillRef>
-          <a:effectRef idx="2">
-            <a:schemeClr val="accent1"/>
-          </a:effectRef>
-          <a:fontRef idx="minor">
-            <a:schemeClr val="lt1"/>
-          </a:fontRef>
-        </p:style>
-        <p:txBody>
-          <a:bodyPr rtlCol="0" anchor="ctr"/>
-          <a:lstStyle/>
-          <a:p>
-            <a:pPr algn="ctr"/>
-            <a:endParaRPr/>
-          </a:p>
-        </p:txBody>
-      </p:sp>
-      <p:sp>
-        <p:nvSpPr>
-          <p:cNvPr id="4" name="TextBox 3"/>
-          <p:cNvSpPr txBox="1"/>
-          <p:nvPr/>
-        </p:nvSpPr>
-        <p:spPr>
-          <a:xfrm>
-            <a:off x="731520" y="274320"/>
-            <a:ext cx="9144000" cy="548640"/>
-          </a:xfrm>
-          <a:prstGeom prst="rect">
-            <a:avLst/>
-          </a:prstGeom>
-          <a:noFill/>
-        </p:spPr>
-        <p:txBody>
-          <a:bodyPr wrap="square">
-            <a:spAutoFit/>
-          </a:bodyPr>
-          <a:lstStyle/>
-          <a:p>
-            <a:pPr algn="l">
-              <a:defRPr sz="2800" b="1">
-                <a:solidFill>
-                  <a:srgbClr val="1B5E6B"/>
-                </a:solidFill>
-              </a:defRPr>
-            </a:pPr>
-            <a:r>
-              <a:t>Five Models Evaluated</a:t>
-            </a:r>
-          </a:p>
-        </p:txBody>
-      </p:sp>
-      <p:sp>
-        <p:nvSpPr>
-          <p:cNvPr id="5" name="Rectangle 4"/>
-          <p:cNvSpPr/>
-          <p:nvPr/>
-        </p:nvSpPr>
-        <p:spPr>
-          <a:xfrm>
-            <a:off x="731520" y="822960"/>
-            <a:ext cx="1645920" cy="54864"/>
-          </a:xfrm>
-          <a:prstGeom prst="rect">
-            <a:avLst/>
-          </a:prstGeom>
-          <a:solidFill>
-            <a:srgbClr val="C5A55A"/>
-          </a:solidFill>
-          <a:ln>
-            <a:noFill/>
-          </a:ln>
-        </p:spPr>
-        <p:style>
-          <a:lnRef idx="1">
-            <a:schemeClr val="accent1"/>
-          </a:lnRef>
-          <a:fillRef idx="3">
-            <a:schemeClr val="accent1"/>
-          </a:fillRef>
-          <a:effectRef idx="2">
-            <a:schemeClr val="accent1"/>
-          </a:effectRef>
-          <a:fontRef idx="minor">
-            <a:schemeClr val="lt1"/>
-          </a:fontRef>
-        </p:style>
-        <p:txBody>
-          <a:bodyPr rtlCol="0" anchor="ctr"/>
-          <a:lstStyle/>
-          <a:p>
-            <a:pPr algn="ctr"/>
-            <a:endParaRPr/>
           </a:p>
         </p:txBody>
       </p:sp>
@@ -8448,7 +8239,7 @@
           </a:fontRef>
         </p:style>
         <p:txBody>
-          <a:bodyPr wrap="square" lIns="137160" tIns="91440" rtlCol="0" anchor="ctr"/>
+          <a:bodyPr rtlCol="0" anchor="ctr" wrap="square" lIns="137160" tIns="91440"/>
           <a:lstStyle/>
           <a:p>
             <a:pPr algn="ctr">
@@ -8532,7 +8323,7 @@
           </a:fontRef>
         </p:style>
         <p:txBody>
-          <a:bodyPr wrap="square" lIns="137160" tIns="91440" rtlCol="0" anchor="ctr"/>
+          <a:bodyPr rtlCol="0" anchor="ctr" wrap="square" lIns="137160" tIns="91440"/>
           <a:lstStyle/>
           <a:p>
             <a:pPr algn="ctr">
@@ -8616,7 +8407,7 @@
           </a:fontRef>
         </p:style>
         <p:txBody>
-          <a:bodyPr wrap="square" lIns="137160" tIns="91440" rtlCol="0" anchor="ctr"/>
+          <a:bodyPr rtlCol="0" anchor="ctr" wrap="square" lIns="137160" tIns="91440"/>
           <a:lstStyle/>
           <a:p>
             <a:pPr algn="ctr">
@@ -8700,7 +8491,7 @@
           </a:fontRef>
         </p:style>
         <p:txBody>
-          <a:bodyPr wrap="square" lIns="137160" tIns="91440" rtlCol="0" anchor="ctr"/>
+          <a:bodyPr rtlCol="0" anchor="ctr" wrap="square" lIns="137160" tIns="91440"/>
           <a:lstStyle/>
           <a:p>
             <a:pPr algn="ctr">
@@ -8784,7 +8575,7 @@
           </a:fontRef>
         </p:style>
         <p:txBody>
-          <a:bodyPr wrap="square" lIns="137160" tIns="91440" rtlCol="0" anchor="ctr"/>
+          <a:bodyPr rtlCol="0" anchor="ctr" wrap="square" lIns="137160" tIns="91440"/>
           <a:lstStyle/>
           <a:p>
             <a:pPr algn="ctr">
@@ -8839,7 +8630,7 @@
 </file>
 
 <file path=ppt/slides/slide7.xml><?xml version="1.0" encoding="utf-8"?>
-<p:sld xmlns:a="http://schemas.openxmlformats.org/drawingml/2006/main" xmlns:r="http://schemas.openxmlformats.org/officeDocument/2006/relationships" xmlns:p="http://schemas.openxmlformats.org/presentationml/2006/main">
+<p:sld xmlns:a="http://schemas.openxmlformats.org/drawingml/2006/main" xmlns:p="http://schemas.openxmlformats.org/presentationml/2006/main" xmlns:r="http://schemas.openxmlformats.org/officeDocument/2006/relationships">
   <p:cSld>
     <p:bg>
       <p:bgPr>
@@ -8855,17 +8646,10 @@
         <p:cNvGrpSpPr/>
         <p:nvPr/>
       </p:nvGrpSpPr>
-      <p:grpSpPr>
-        <a:xfrm>
-          <a:off x="0" y="0"/>
-          <a:ext cx="0" cy="0"/>
-          <a:chOff x="0" y="0"/>
-          <a:chExt cx="0" cy="0"/>
-        </a:xfrm>
-      </p:grpSpPr>
+      <p:grpSpPr/>
       <p:pic>
         <p:nvPicPr>
-          <p:cNvPr id="2" name="Picture 1" descr="images.png"/>
+          <p:cNvPr id="2" name="Picture 1" descr="logo.png"/>
           <p:cNvPicPr>
             <a:picLocks noChangeAspect="1"/>
           </p:cNvPicPr>
@@ -8927,7 +8711,6 @@
           <a:lstStyle/>
           <a:p>
             <a:pPr algn="ctr"/>
-            <a:endParaRPr/>
           </a:p>
         </p:txBody>
       </p:sp>
@@ -9006,7 +8789,6 @@
           <a:lstStyle/>
           <a:p>
             <a:pPr algn="ctr"/>
-            <a:endParaRPr/>
           </a:p>
         </p:txBody>
       </p:sp>
@@ -9064,55 +8846,13 @@
                 <a:tableStyleId>{5C22544A-7EE6-4342-B048-85BDC9FD1C3A}</a:tableStyleId>
               </a:tblPr>
               <a:tblGrid>
-                <a:gridCol w="1606731">
-                  <a:extLst>
-                    <a:ext uri="{9D8B030D-6E8A-4147-A177-3AD203B41FA5}">
-                      <a16:colId xmlns:a16="http://schemas.microsoft.com/office/drawing/2014/main" val="20000"/>
-                    </a:ext>
-                  </a:extLst>
-                </a:gridCol>
-                <a:gridCol w="1606731">
-                  <a:extLst>
-                    <a:ext uri="{9D8B030D-6E8A-4147-A177-3AD203B41FA5}">
-                      <a16:colId xmlns:a16="http://schemas.microsoft.com/office/drawing/2014/main" val="20001"/>
-                    </a:ext>
-                  </a:extLst>
-                </a:gridCol>
-                <a:gridCol w="1606731">
-                  <a:extLst>
-                    <a:ext uri="{9D8B030D-6E8A-4147-A177-3AD203B41FA5}">
-                      <a16:colId xmlns:a16="http://schemas.microsoft.com/office/drawing/2014/main" val="20002"/>
-                    </a:ext>
-                  </a:extLst>
-                </a:gridCol>
-                <a:gridCol w="1606731">
-                  <a:extLst>
-                    <a:ext uri="{9D8B030D-6E8A-4147-A177-3AD203B41FA5}">
-                      <a16:colId xmlns:a16="http://schemas.microsoft.com/office/drawing/2014/main" val="20003"/>
-                    </a:ext>
-                  </a:extLst>
-                </a:gridCol>
-                <a:gridCol w="1606731">
-                  <a:extLst>
-                    <a:ext uri="{9D8B030D-6E8A-4147-A177-3AD203B41FA5}">
-                      <a16:colId xmlns:a16="http://schemas.microsoft.com/office/drawing/2014/main" val="20004"/>
-                    </a:ext>
-                  </a:extLst>
-                </a:gridCol>
-                <a:gridCol w="1606731">
-                  <a:extLst>
-                    <a:ext uri="{9D8B030D-6E8A-4147-A177-3AD203B41FA5}">
-                      <a16:colId xmlns:a16="http://schemas.microsoft.com/office/drawing/2014/main" val="20005"/>
-                    </a:ext>
-                  </a:extLst>
-                </a:gridCol>
-                <a:gridCol w="1606734">
-                  <a:extLst>
-                    <a:ext uri="{9D8B030D-6E8A-4147-A177-3AD203B41FA5}">
-                      <a16:colId xmlns:a16="http://schemas.microsoft.com/office/drawing/2014/main" val="20006"/>
-                    </a:ext>
-                  </a:extLst>
-                </a:gridCol>
+                <a:gridCol w="1606731"/>
+                <a:gridCol w="1606731"/>
+                <a:gridCol w="1606731"/>
+                <a:gridCol w="1606731"/>
+                <a:gridCol w="1606731"/>
+                <a:gridCol w="1606731"/>
+                <a:gridCol w="1606734"/>
               </a:tblGrid>
               <a:tr h="457200">
                 <a:tc>
@@ -9121,7 +8861,7 @@
                     <a:lstStyle/>
                     <a:p>
                       <a:pPr algn="ctr">
-                        <a:defRPr sz="1100" b="1">
+                        <a:defRPr b="1" sz="1100">
                           <a:solidFill>
                             <a:srgbClr val="FFFFFF"/>
                           </a:solidFill>
@@ -9144,7 +8884,7 @@
                     <a:lstStyle/>
                     <a:p>
                       <a:pPr algn="ctr">
-                        <a:defRPr sz="1100" b="1">
+                        <a:defRPr b="1" sz="1100">
                           <a:solidFill>
                             <a:srgbClr val="FFFFFF"/>
                           </a:solidFill>
@@ -9156,7 +8896,7 @@
                     </a:p>
                     <a:p>
                       <a:pPr algn="ctr">
-                        <a:defRPr sz="1100" b="1">
+                        <a:defRPr b="1" sz="1100">
                           <a:solidFill>
                             <a:srgbClr val="FFFFFF"/>
                           </a:solidFill>
@@ -9179,7 +8919,7 @@
                     <a:lstStyle/>
                     <a:p>
                       <a:pPr algn="ctr">
-                        <a:defRPr sz="1100" b="1">
+                        <a:defRPr b="1" sz="1100">
                           <a:solidFill>
                             <a:srgbClr val="FFFFFF"/>
                           </a:solidFill>
@@ -9191,7 +8931,7 @@
                     </a:p>
                     <a:p>
                       <a:pPr algn="ctr">
-                        <a:defRPr sz="1100" b="1">
+                        <a:defRPr b="1" sz="1100">
                           <a:solidFill>
                             <a:srgbClr val="FFFFFF"/>
                           </a:solidFill>
@@ -9214,7 +8954,7 @@
                     <a:lstStyle/>
                     <a:p>
                       <a:pPr algn="ctr">
-                        <a:defRPr sz="1100" b="1">
+                        <a:defRPr b="1" sz="1100">
                           <a:solidFill>
                             <a:srgbClr val="FFFFFF"/>
                           </a:solidFill>
@@ -9226,7 +8966,7 @@
                     </a:p>
                     <a:p>
                       <a:pPr algn="ctr">
-                        <a:defRPr sz="1100" b="1">
+                        <a:defRPr b="1" sz="1100">
                           <a:solidFill>
                             <a:srgbClr val="FFFFFF"/>
                           </a:solidFill>
@@ -9249,7 +8989,7 @@
                     <a:lstStyle/>
                     <a:p>
                       <a:pPr algn="ctr">
-                        <a:defRPr sz="1100" b="1">
+                        <a:defRPr b="1" sz="1100">
                           <a:solidFill>
                             <a:srgbClr val="FFFFFF"/>
                           </a:solidFill>
@@ -9261,7 +9001,7 @@
                     </a:p>
                     <a:p>
                       <a:pPr algn="ctr">
-                        <a:defRPr sz="1100" b="1">
+                        <a:defRPr b="1" sz="1100">
                           <a:solidFill>
                             <a:srgbClr val="FFFFFF"/>
                           </a:solidFill>
@@ -9284,7 +9024,7 @@
                     <a:lstStyle/>
                     <a:p>
                       <a:pPr algn="ctr">
-                        <a:defRPr sz="1100" b="1">
+                        <a:defRPr b="1" sz="1100">
                           <a:solidFill>
                             <a:srgbClr val="FFFFFF"/>
                           </a:solidFill>
@@ -9296,7 +9036,7 @@
                     </a:p>
                     <a:p>
                       <a:pPr algn="ctr">
-                        <a:defRPr sz="1100" b="1">
+                        <a:defRPr b="1" sz="1100">
                           <a:solidFill>
                             <a:srgbClr val="FFFFFF"/>
                           </a:solidFill>
@@ -9319,7 +9059,7 @@
                     <a:lstStyle/>
                     <a:p>
                       <a:pPr algn="ctr">
-                        <a:defRPr sz="1100" b="1">
+                        <a:defRPr b="1" sz="1100">
                           <a:solidFill>
                             <a:srgbClr val="FFFFFF"/>
                           </a:solidFill>
@@ -9336,11 +9076,6 @@
                     </a:solidFill>
                   </a:tcPr>
                 </a:tc>
-                <a:extLst>
-                  <a:ext uri="{0D108BD9-81ED-4DB2-BD59-A6C34878D82A}">
-                    <a16:rowId xmlns:a16="http://schemas.microsoft.com/office/drawing/2014/main" val="10000"/>
-                  </a:ext>
-                </a:extLst>
               </a:tr>
               <a:tr h="457200">
                 <a:tc>
@@ -9480,11 +9215,6 @@
                     </a:solidFill>
                   </a:tcPr>
                 </a:tc>
-                <a:extLst>
-                  <a:ext uri="{0D108BD9-81ED-4DB2-BD59-A6C34878D82A}">
-                    <a16:rowId xmlns:a16="http://schemas.microsoft.com/office/drawing/2014/main" val="10001"/>
-                  </a:ext>
-                </a:extLst>
               </a:tr>
               <a:tr h="457200">
                 <a:tc>
@@ -9624,11 +9354,6 @@
                     </a:solidFill>
                   </a:tcPr>
                 </a:tc>
-                <a:extLst>
-                  <a:ext uri="{0D108BD9-81ED-4DB2-BD59-A6C34878D82A}">
-                    <a16:rowId xmlns:a16="http://schemas.microsoft.com/office/drawing/2014/main" val="10002"/>
-                  </a:ext>
-                </a:extLst>
               </a:tr>
               <a:tr h="457200">
                 <a:tc>
@@ -9768,11 +9493,6 @@
                     </a:solidFill>
                   </a:tcPr>
                 </a:tc>
-                <a:extLst>
-                  <a:ext uri="{0D108BD9-81ED-4DB2-BD59-A6C34878D82A}">
-                    <a16:rowId xmlns:a16="http://schemas.microsoft.com/office/drawing/2014/main" val="10003"/>
-                  </a:ext>
-                </a:extLst>
               </a:tr>
               <a:tr h="457200">
                 <a:tc>
@@ -9912,11 +9632,6 @@
                     </a:solidFill>
                   </a:tcPr>
                 </a:tc>
-                <a:extLst>
-                  <a:ext uri="{0D108BD9-81ED-4DB2-BD59-A6C34878D82A}">
-                    <a16:rowId xmlns:a16="http://schemas.microsoft.com/office/drawing/2014/main" val="10004"/>
-                  </a:ext>
-                </a:extLst>
               </a:tr>
             </a:tbl>
           </a:graphicData>
@@ -9960,7 +9675,7 @@
           </a:fontRef>
         </p:style>
         <p:txBody>
-          <a:bodyPr wrap="square" lIns="182880" tIns="137160" rtlCol="0" anchor="ctr"/>
+          <a:bodyPr rtlCol="0" anchor="ctr" wrap="square" lIns="182880" tIns="137160"/>
           <a:lstStyle/>
           <a:p>
             <a:pPr algn="ctr">
@@ -10008,7 +9723,7 @@
 </file>
 
 <file path=ppt/slides/slide8.xml><?xml version="1.0" encoding="utf-8"?>
-<p:sld xmlns:a="http://schemas.openxmlformats.org/drawingml/2006/main" xmlns:r="http://schemas.openxmlformats.org/officeDocument/2006/relationships" xmlns:p="http://schemas.openxmlformats.org/presentationml/2006/main">
+<p:sld xmlns:a="http://schemas.openxmlformats.org/drawingml/2006/main" xmlns:p="http://schemas.openxmlformats.org/presentationml/2006/main" xmlns:r="http://schemas.openxmlformats.org/officeDocument/2006/relationships">
   <p:cSld>
     <p:bg>
       <p:bgPr>
@@ -10024,17 +9739,10 @@
         <p:cNvGrpSpPr/>
         <p:nvPr/>
       </p:nvGrpSpPr>
-      <p:grpSpPr>
-        <a:xfrm>
-          <a:off x="0" y="0"/>
-          <a:ext cx="0" cy="0"/>
-          <a:chOff x="0" y="0"/>
-          <a:chExt cx="0" cy="0"/>
-        </a:xfrm>
-      </p:grpSpPr>
+      <p:grpSpPr/>
       <p:pic>
         <p:nvPicPr>
-          <p:cNvPr id="2" name="Picture 1" descr="images.png"/>
+          <p:cNvPr id="2" name="Picture 1" descr="logo.png"/>
           <p:cNvPicPr>
             <a:picLocks noChangeAspect="1"/>
           </p:cNvPicPr>
@@ -10096,7 +9804,6 @@
           <a:lstStyle/>
           <a:p>
             <a:pPr algn="ctr"/>
-            <a:endParaRPr/>
           </a:p>
         </p:txBody>
       </p:sp>
@@ -10175,7 +9882,6 @@
           <a:lstStyle/>
           <a:p>
             <a:pPr algn="ctr"/>
-            <a:endParaRPr/>
           </a:p>
         </p:txBody>
       </p:sp>
@@ -10198,48 +9904,12 @@
                 <a:tableStyleId>{5C22544A-7EE6-4342-B048-85BDC9FD1C3A}</a:tableStyleId>
               </a:tblPr>
               <a:tblGrid>
-                <a:gridCol w="1905000">
-                  <a:extLst>
-                    <a:ext uri="{9D8B030D-6E8A-4147-A177-3AD203B41FA5}">
-                      <a16:colId xmlns:a16="http://schemas.microsoft.com/office/drawing/2014/main" val="20000"/>
-                    </a:ext>
-                  </a:extLst>
-                </a:gridCol>
-                <a:gridCol w="1905000">
-                  <a:extLst>
-                    <a:ext uri="{9D8B030D-6E8A-4147-A177-3AD203B41FA5}">
-                      <a16:colId xmlns:a16="http://schemas.microsoft.com/office/drawing/2014/main" val="20001"/>
-                    </a:ext>
-                  </a:extLst>
-                </a:gridCol>
-                <a:gridCol w="1905000">
-                  <a:extLst>
-                    <a:ext uri="{9D8B030D-6E8A-4147-A177-3AD203B41FA5}">
-                      <a16:colId xmlns:a16="http://schemas.microsoft.com/office/drawing/2014/main" val="20002"/>
-                    </a:ext>
-                  </a:extLst>
-                </a:gridCol>
-                <a:gridCol w="1905000">
-                  <a:extLst>
-                    <a:ext uri="{9D8B030D-6E8A-4147-A177-3AD203B41FA5}">
-                      <a16:colId xmlns:a16="http://schemas.microsoft.com/office/drawing/2014/main" val="20003"/>
-                    </a:ext>
-                  </a:extLst>
-                </a:gridCol>
-                <a:gridCol w="1905000">
-                  <a:extLst>
-                    <a:ext uri="{9D8B030D-6E8A-4147-A177-3AD203B41FA5}">
-                      <a16:colId xmlns:a16="http://schemas.microsoft.com/office/drawing/2014/main" val="20004"/>
-                    </a:ext>
-                  </a:extLst>
-                </a:gridCol>
-                <a:gridCol w="1905000">
-                  <a:extLst>
-                    <a:ext uri="{9D8B030D-6E8A-4147-A177-3AD203B41FA5}">
-                      <a16:colId xmlns:a16="http://schemas.microsoft.com/office/drawing/2014/main" val="20005"/>
-                    </a:ext>
-                  </a:extLst>
-                </a:gridCol>
+                <a:gridCol w="1905000"/>
+                <a:gridCol w="1905000"/>
+                <a:gridCol w="1905000"/>
+                <a:gridCol w="1905000"/>
+                <a:gridCol w="1905000"/>
+                <a:gridCol w="1905000"/>
               </a:tblGrid>
               <a:tr h="418011">
                 <a:tc>
@@ -10248,7 +9918,7 @@
                     <a:lstStyle/>
                     <a:p>
                       <a:pPr algn="ctr">
-                        <a:defRPr sz="1100" b="1">
+                        <a:defRPr b="1" sz="1100">
                           <a:solidFill>
                             <a:srgbClr val="FFFFFF"/>
                           </a:solidFill>
@@ -10271,7 +9941,7 @@
                     <a:lstStyle/>
                     <a:p>
                       <a:pPr algn="ctr">
-                        <a:defRPr sz="1100" b="1">
+                        <a:defRPr b="1" sz="1100">
                           <a:solidFill>
                             <a:srgbClr val="FFFFFF"/>
                           </a:solidFill>
@@ -10294,7 +9964,7 @@
                     <a:lstStyle/>
                     <a:p>
                       <a:pPr algn="ctr">
-                        <a:defRPr sz="1100" b="1">
+                        <a:defRPr b="1" sz="1100">
                           <a:solidFill>
                             <a:srgbClr val="FFFFFF"/>
                           </a:solidFill>
@@ -10317,7 +9987,7 @@
                     <a:lstStyle/>
                     <a:p>
                       <a:pPr algn="ctr">
-                        <a:defRPr sz="1100" b="1">
+                        <a:defRPr b="1" sz="1100">
                           <a:solidFill>
                             <a:srgbClr val="FFFFFF"/>
                           </a:solidFill>
@@ -10329,7 +9999,7 @@
                     </a:p>
                     <a:p>
                       <a:pPr algn="ctr">
-                        <a:defRPr sz="1100" b="1">
+                        <a:defRPr b="1" sz="1100">
                           <a:solidFill>
                             <a:srgbClr val="FFFFFF"/>
                           </a:solidFill>
@@ -10352,7 +10022,7 @@
                     <a:lstStyle/>
                     <a:p>
                       <a:pPr algn="ctr">
-                        <a:defRPr sz="1100" b="1">
+                        <a:defRPr b="1" sz="1100">
                           <a:solidFill>
                             <a:srgbClr val="FFFFFF"/>
                           </a:solidFill>
@@ -10364,7 +10034,7 @@
                     </a:p>
                     <a:p>
                       <a:pPr algn="ctr">
-                        <a:defRPr sz="1100" b="1">
+                        <a:defRPr b="1" sz="1100">
                           <a:solidFill>
                             <a:srgbClr val="FFFFFF"/>
                           </a:solidFill>
@@ -10387,7 +10057,7 @@
                     <a:lstStyle/>
                     <a:p>
                       <a:pPr algn="ctr">
-                        <a:defRPr sz="1100" b="1">
+                        <a:defRPr b="1" sz="1100">
                           <a:solidFill>
                             <a:srgbClr val="FFFFFF"/>
                           </a:solidFill>
@@ -10404,11 +10074,6 @@
                     </a:solidFill>
                   </a:tcPr>
                 </a:tc>
-                <a:extLst>
-                  <a:ext uri="{0D108BD9-81ED-4DB2-BD59-A6C34878D82A}">
-                    <a16:rowId xmlns:a16="http://schemas.microsoft.com/office/drawing/2014/main" val="10000"/>
-                  </a:ext>
-                </a:extLst>
               </a:tr>
               <a:tr h="418011">
                 <a:tc>
@@ -10525,11 +10190,6 @@
                   </a:txBody>
                   <a:tcPr/>
                 </a:tc>
-                <a:extLst>
-                  <a:ext uri="{0D108BD9-81ED-4DB2-BD59-A6C34878D82A}">
-                    <a16:rowId xmlns:a16="http://schemas.microsoft.com/office/drawing/2014/main" val="10001"/>
-                  </a:ext>
-                </a:extLst>
               </a:tr>
               <a:tr h="418011">
                 <a:tc>
@@ -10646,11 +10306,6 @@
                   </a:txBody>
                   <a:tcPr/>
                 </a:tc>
-                <a:extLst>
-                  <a:ext uri="{0D108BD9-81ED-4DB2-BD59-A6C34878D82A}">
-                    <a16:rowId xmlns:a16="http://schemas.microsoft.com/office/drawing/2014/main" val="10002"/>
-                  </a:ext>
-                </a:extLst>
               </a:tr>
               <a:tr h="418011">
                 <a:tc>
@@ -10767,11 +10422,6 @@
                   </a:txBody>
                   <a:tcPr/>
                 </a:tc>
-                <a:extLst>
-                  <a:ext uri="{0D108BD9-81ED-4DB2-BD59-A6C34878D82A}">
-                    <a16:rowId xmlns:a16="http://schemas.microsoft.com/office/drawing/2014/main" val="10003"/>
-                  </a:ext>
-                </a:extLst>
               </a:tr>
               <a:tr h="418011">
                 <a:tc>
@@ -10892,11 +10542,6 @@
                     </a:solidFill>
                   </a:tcPr>
                 </a:tc>
-                <a:extLst>
-                  <a:ext uri="{0D108BD9-81ED-4DB2-BD59-A6C34878D82A}">
-                    <a16:rowId xmlns:a16="http://schemas.microsoft.com/office/drawing/2014/main" val="10004"/>
-                  </a:ext>
-                </a:extLst>
               </a:tr>
               <a:tr h="418011">
                 <a:tc>
@@ -11017,11 +10662,6 @@
                     </a:solidFill>
                   </a:tcPr>
                 </a:tc>
-                <a:extLst>
-                  <a:ext uri="{0D108BD9-81ED-4DB2-BD59-A6C34878D82A}">
-                    <a16:rowId xmlns:a16="http://schemas.microsoft.com/office/drawing/2014/main" val="10005"/>
-                  </a:ext>
-                </a:extLst>
               </a:tr>
               <a:tr h="418014">
                 <a:tc>
@@ -11138,11 +10778,6 @@
                   </a:txBody>
                   <a:tcPr/>
                 </a:tc>
-                <a:extLst>
-                  <a:ext uri="{0D108BD9-81ED-4DB2-BD59-A6C34878D82A}">
-                    <a16:rowId xmlns:a16="http://schemas.microsoft.com/office/drawing/2014/main" val="10006"/>
-                  </a:ext>
-                </a:extLst>
               </a:tr>
             </a:tbl>
           </a:graphicData>
@@ -11196,7 +10831,7 @@
 </file>
 
 <file path=ppt/slides/slide9.xml><?xml version="1.0" encoding="utf-8"?>
-<p:sld xmlns:a="http://schemas.openxmlformats.org/drawingml/2006/main" xmlns:r="http://schemas.openxmlformats.org/officeDocument/2006/relationships" xmlns:p="http://schemas.openxmlformats.org/presentationml/2006/main">
+<p:sld xmlns:a="http://schemas.openxmlformats.org/drawingml/2006/main" xmlns:p="http://schemas.openxmlformats.org/presentationml/2006/main" xmlns:r="http://schemas.openxmlformats.org/officeDocument/2006/relationships">
   <p:cSld>
     <p:bg>
       <p:bgPr>
@@ -11212,17 +10847,10 @@
         <p:cNvGrpSpPr/>
         <p:nvPr/>
       </p:nvGrpSpPr>
-      <p:grpSpPr>
-        <a:xfrm>
-          <a:off x="0" y="0"/>
-          <a:ext cx="0" cy="0"/>
-          <a:chOff x="0" y="0"/>
-          <a:chExt cx="0" cy="0"/>
-        </a:xfrm>
-      </p:grpSpPr>
+      <p:grpSpPr/>
       <p:pic>
         <p:nvPicPr>
-          <p:cNvPr id="2" name="Picture 1" descr="images.png"/>
+          <p:cNvPr id="2" name="Picture 1" descr="logo.png"/>
           <p:cNvPicPr>
             <a:picLocks noChangeAspect="1"/>
           </p:cNvPicPr>
@@ -11284,7 +10912,6 @@
           <a:lstStyle/>
           <a:p>
             <a:pPr algn="ctr"/>
-            <a:endParaRPr/>
           </a:p>
         </p:txBody>
       </p:sp>
@@ -11363,7 +10990,6 @@
           <a:lstStyle/>
           <a:p>
             <a:pPr algn="ctr"/>
-            <a:endParaRPr/>
           </a:p>
         </p:txBody>
       </p:sp>
@@ -11421,41 +11047,11 @@
                 <a:tableStyleId>{5C22544A-7EE6-4342-B048-85BDC9FD1C3A}</a:tableStyleId>
               </a:tblPr>
               <a:tblGrid>
-                <a:gridCol w="2011680">
-                  <a:extLst>
-                    <a:ext uri="{9D8B030D-6E8A-4147-A177-3AD203B41FA5}">
-                      <a16:colId xmlns:a16="http://schemas.microsoft.com/office/drawing/2014/main" val="20000"/>
-                    </a:ext>
-                  </a:extLst>
-                </a:gridCol>
-                <a:gridCol w="2011680">
-                  <a:extLst>
-                    <a:ext uri="{9D8B030D-6E8A-4147-A177-3AD203B41FA5}">
-                      <a16:colId xmlns:a16="http://schemas.microsoft.com/office/drawing/2014/main" val="20001"/>
-                    </a:ext>
-                  </a:extLst>
-                </a:gridCol>
-                <a:gridCol w="2011680">
-                  <a:extLst>
-                    <a:ext uri="{9D8B030D-6E8A-4147-A177-3AD203B41FA5}">
-                      <a16:colId xmlns:a16="http://schemas.microsoft.com/office/drawing/2014/main" val="20002"/>
-                    </a:ext>
-                  </a:extLst>
-                </a:gridCol>
-                <a:gridCol w="2011680">
-                  <a:extLst>
-                    <a:ext uri="{9D8B030D-6E8A-4147-A177-3AD203B41FA5}">
-                      <a16:colId xmlns:a16="http://schemas.microsoft.com/office/drawing/2014/main" val="20003"/>
-                    </a:ext>
-                  </a:extLst>
-                </a:gridCol>
-                <a:gridCol w="2011680">
-                  <a:extLst>
-                    <a:ext uri="{9D8B030D-6E8A-4147-A177-3AD203B41FA5}">
-                      <a16:colId xmlns:a16="http://schemas.microsoft.com/office/drawing/2014/main" val="20004"/>
-                    </a:ext>
-                  </a:extLst>
-                </a:gridCol>
+                <a:gridCol w="2011680"/>
+                <a:gridCol w="2011680"/>
+                <a:gridCol w="2011680"/>
+                <a:gridCol w="2011680"/>
+                <a:gridCol w="2011680"/>
               </a:tblGrid>
               <a:tr h="457200">
                 <a:tc>
@@ -11464,7 +11060,7 @@
                     <a:lstStyle/>
                     <a:p>
                       <a:pPr algn="ctr">
-                        <a:defRPr sz="1100" b="1">
+                        <a:defRPr b="1" sz="1100">
                           <a:solidFill>
                             <a:srgbClr val="FFFFFF"/>
                           </a:solidFill>
@@ -11487,7 +11083,7 @@
                     <a:lstStyle/>
                     <a:p>
                       <a:pPr algn="ctr">
-                        <a:defRPr sz="1100" b="1">
+                        <a:defRPr b="1" sz="1100">
                           <a:solidFill>
                             <a:srgbClr val="FFFFFF"/>
                           </a:solidFill>
@@ -11510,7 +11106,7 @@
                     <a:lstStyle/>
                     <a:p>
                       <a:pPr algn="ctr">
-                        <a:defRPr sz="1100" b="1">
+                        <a:defRPr b="1" sz="1100">
                           <a:solidFill>
                             <a:srgbClr val="FFFFFF"/>
                           </a:solidFill>
@@ -11533,7 +11129,7 @@
                     <a:lstStyle/>
                     <a:p>
                       <a:pPr algn="ctr">
-                        <a:defRPr sz="1100" b="1">
+                        <a:defRPr b="1" sz="1100">
                           <a:solidFill>
                             <a:srgbClr val="FFFFFF"/>
                           </a:solidFill>
@@ -11545,7 +11141,7 @@
                     </a:p>
                     <a:p>
                       <a:pPr algn="ctr">
-                        <a:defRPr sz="1100" b="1">
+                        <a:defRPr b="1" sz="1100">
                           <a:solidFill>
                             <a:srgbClr val="FFFFFF"/>
                           </a:solidFill>
@@ -11568,7 +11164,7 @@
                     <a:lstStyle/>
                     <a:p>
                       <a:pPr algn="ctr">
-                        <a:defRPr sz="1100" b="1">
+                        <a:defRPr b="1" sz="1100">
                           <a:solidFill>
                             <a:srgbClr val="FFFFFF"/>
                           </a:solidFill>
@@ -11580,7 +11176,7 @@
                     </a:p>
                     <a:p>
                       <a:pPr algn="ctr">
-                        <a:defRPr sz="1100" b="1">
+                        <a:defRPr b="1" sz="1100">
                           <a:solidFill>
                             <a:srgbClr val="FFFFFF"/>
                           </a:solidFill>
@@ -11597,11 +11193,6 @@
                     </a:solidFill>
                   </a:tcPr>
                 </a:tc>
-                <a:extLst>
-                  <a:ext uri="{0D108BD9-81ED-4DB2-BD59-A6C34878D82A}">
-                    <a16:rowId xmlns:a16="http://schemas.microsoft.com/office/drawing/2014/main" val="10000"/>
-                  </a:ext>
-                </a:extLst>
               </a:tr>
               <a:tr h="457200">
                 <a:tc>
@@ -11703,11 +11294,6 @@
                   </a:txBody>
                   <a:tcPr/>
                 </a:tc>
-                <a:extLst>
-                  <a:ext uri="{0D108BD9-81ED-4DB2-BD59-A6C34878D82A}">
-                    <a16:rowId xmlns:a16="http://schemas.microsoft.com/office/drawing/2014/main" val="10001"/>
-                  </a:ext>
-                </a:extLst>
               </a:tr>
               <a:tr h="457200">
                 <a:tc>
@@ -11809,11 +11395,6 @@
                   </a:txBody>
                   <a:tcPr/>
                 </a:tc>
-                <a:extLst>
-                  <a:ext uri="{0D108BD9-81ED-4DB2-BD59-A6C34878D82A}">
-                    <a16:rowId xmlns:a16="http://schemas.microsoft.com/office/drawing/2014/main" val="10002"/>
-                  </a:ext>
-                </a:extLst>
               </a:tr>
               <a:tr h="457200">
                 <a:tc>
@@ -11915,11 +11496,6 @@
                   </a:txBody>
                   <a:tcPr/>
                 </a:tc>
-                <a:extLst>
-                  <a:ext uri="{0D108BD9-81ED-4DB2-BD59-A6C34878D82A}">
-                    <a16:rowId xmlns:a16="http://schemas.microsoft.com/office/drawing/2014/main" val="10003"/>
-                  </a:ext>
-                </a:extLst>
               </a:tr>
             </a:tbl>
           </a:graphicData>
